--- a/2026/1019-EnergyPlus-MCP_A model-context-protocol server for ai-driven building energy modeling/EnergyPlus-MCP_Concepts_Presentation.pptx
+++ b/2026/1019-EnergyPlus-MCP_A model-context-protocol server for ai-driven building energy modeling/EnergyPlus-MCP_Concepts_Presentation.pptx
@@ -5,7 +5,7 @@
     <p:sldMasterId id="2147483648" r:id="rId1"/>
   </p:sldMasterIdLst>
   <p:notesMasterIdLst>
-    <p:notesMasterId r:id="rId15"/>
+    <p:notesMasterId r:id="rId19"/>
   </p:notesMasterIdLst>
   <p:sldIdLst>
     <p:sldId id="256" r:id="rId2"/>
@@ -21,6 +21,10 @@
     <p:sldId id="261" r:id="rId12"/>
     <p:sldId id="263" r:id="rId13"/>
     <p:sldId id="264" r:id="rId14"/>
+    <p:sldId id="269" r:id="rId15"/>
+    <p:sldId id="270" r:id="rId16"/>
+    <p:sldId id="271" r:id="rId17"/>
+    <p:sldId id="272" r:id="rId18"/>
   </p:sldIdLst>
   <p:sldSz cx="12192000" cy="6858000"/>
   <p:notesSz cx="6858000" cy="9144000"/>
@@ -125,7 +129,7 @@
 <file path=ppt/revisionInfo.xml><?xml version="1.0" encoding="utf-8"?>
 <p1510:revInfo xmlns:a="http://schemas.openxmlformats.org/drawingml/2006/main" xmlns:r="http://schemas.openxmlformats.org/officeDocument/2006/relationships" xmlns:p1510="http://schemas.microsoft.com/office/powerpoint/2015/10/main">
   <p1510:revLst>
-    <p1510:client id="{6E4C01DA-322B-8A54-7AEE-BBEF3C6A28BC}" v="146" dt="2026-10-19T04:50:30.162"/>
+    <p1510:client id="{6E4C01DA-322B-8A54-7AEE-BBEF3C6A28BC}" v="179" dt="2026-10-19T05:06:47.323"/>
   </p1510:revLst>
 </p1510:revInfo>
 </file>
@@ -734,6 +738,470 @@
         </p:txBody>
       </p:sp>
     </p:spTree>
+  </p:cSld>
+  <p:clrMapOvr>
+    <a:masterClrMapping/>
+  </p:clrMapOvr>
+</p:notes>
+</file>
+
+<file path=ppt/notesSlides/notesSlide14.xml><?xml version="1.0" encoding="utf-8"?>
+<p:notes xmlns:a="http://schemas.openxmlformats.org/drawingml/2006/main" xmlns:r="http://schemas.openxmlformats.org/officeDocument/2006/relationships" xmlns:p="http://schemas.openxmlformats.org/presentationml/2006/main">
+  <p:cSld>
+    <p:spTree>
+      <p:nvGrpSpPr>
+        <p:cNvPr id="1" name="">
+          <a:extLst>
+            <a:ext uri="{FF2B5EF4-FFF2-40B4-BE49-F238E27FC236}">
+              <a16:creationId xmlns:a16="http://schemas.microsoft.com/office/drawing/2014/main" id="{0FFD7104-5AC6-06AD-2AF4-418CB7475642}"/>
+            </a:ext>
+          </a:extLst>
+        </p:cNvPr>
+        <p:cNvGrpSpPr/>
+        <p:nvPr/>
+      </p:nvGrpSpPr>
+      <p:grpSpPr>
+        <a:xfrm>
+          <a:off x="0" y="0"/>
+          <a:ext cx="0" cy="0"/>
+          <a:chOff x="0" y="0"/>
+          <a:chExt cx="0" cy="0"/>
+        </a:xfrm>
+      </p:grpSpPr>
+      <p:sp>
+        <p:nvSpPr>
+          <p:cNvPr id="2" name="Slide Image Placeholder 1">
+            <a:extLst>
+              <a:ext uri="{FF2B5EF4-FFF2-40B4-BE49-F238E27FC236}">
+                <a16:creationId xmlns:a16="http://schemas.microsoft.com/office/drawing/2014/main" id="{735E44BB-675D-3594-235B-19889C08A615}"/>
+              </a:ext>
+            </a:extLst>
+          </p:cNvPr>
+          <p:cNvSpPr>
+            <a:spLocks noGrp="1" noRot="1" noChangeAspect="1"/>
+          </p:cNvSpPr>
+          <p:nvPr>
+            <p:ph type="sldImg"/>
+          </p:nvPr>
+        </p:nvSpPr>
+        <p:spPr/>
+      </p:sp>
+      <p:sp>
+        <p:nvSpPr>
+          <p:cNvPr id="3" name="Notes Placeholder 2">
+            <a:extLst>
+              <a:ext uri="{FF2B5EF4-FFF2-40B4-BE49-F238E27FC236}">
+                <a16:creationId xmlns:a16="http://schemas.microsoft.com/office/drawing/2014/main" id="{EED22FD2-11AB-81B9-FD90-BBBDAACC1347}"/>
+              </a:ext>
+            </a:extLst>
+          </p:cNvPr>
+          <p:cNvSpPr>
+            <a:spLocks noGrp="1"/>
+          </p:cNvSpPr>
+          <p:nvPr>
+            <p:ph type="body" idx="1"/>
+          </p:nvPr>
+        </p:nvSpPr>
+        <p:spPr/>
+        <p:txBody>
+          <a:bodyPr/>
+          <a:lstStyle/>
+          <a:p>
+            <a:r>
+              <a:t>Host 是應用程式，並不是 LLM 本身。它整合互動、工具連線與執行流程；其中的 client 管理與 server 的 MCP 連線。Server 公開工具並執行要求。</a:t>
+            </a:r>
+          </a:p>
+          <a:p>
+            <a:r>
+              <a:t>論文圖 1 將 IDE、AI 助手與新 BEM 應用概括放在 Clients 區塊。講解時可區分完整應用 Host 與內部連線元件 Client，避免把模型和應用混為一談。</a:t>
+            </a:r>
+          </a:p>
+          <a:p>
+            <a:r>
+              <a:t>FastMCP 是作者用來建構 server 的框架。它負責協定與工具分派，modify_lights 等才是工具。來源：論文 Section 2.1、Fig.1；作者 server.py。</a:t>
+            </a:r>
+          </a:p>
+        </p:txBody>
+      </p:sp>
+      <p:sp>
+        <p:nvSpPr>
+          <p:cNvPr id="4" name="Slide Number Placeholder 3">
+            <a:extLst>
+              <a:ext uri="{FF2B5EF4-FFF2-40B4-BE49-F238E27FC236}">
+                <a16:creationId xmlns:a16="http://schemas.microsoft.com/office/drawing/2014/main" id="{2E5AACDA-BE08-B747-8448-937F62775FE8}"/>
+              </a:ext>
+            </a:extLst>
+          </p:cNvPr>
+          <p:cNvSpPr>
+            <a:spLocks noGrp="1"/>
+          </p:cNvSpPr>
+          <p:nvPr>
+            <p:ph type="sldNum" idx="5"/>
+          </p:nvPr>
+        </p:nvSpPr>
+        <p:spPr/>
+        <p:txBody>
+          <a:bodyPr/>
+          <a:lstStyle/>
+          <a:p>
+            <a:endParaRPr/>
+          </a:p>
+        </p:txBody>
+      </p:sp>
+    </p:spTree>
+    <p:extLst>
+      <p:ext uri="{BB962C8B-B14F-4D97-AF65-F5344CB8AC3E}">
+        <p14:creationId xmlns:p14="http://schemas.microsoft.com/office/powerpoint/2010/main" val="3044372735"/>
+      </p:ext>
+    </p:extLst>
+  </p:cSld>
+  <p:clrMapOvr>
+    <a:masterClrMapping/>
+  </p:clrMapOvr>
+</p:notes>
+</file>
+
+<file path=ppt/notesSlides/notesSlide15.xml><?xml version="1.0" encoding="utf-8"?>
+<p:notes xmlns:a="http://schemas.openxmlformats.org/drawingml/2006/main" xmlns:r="http://schemas.openxmlformats.org/officeDocument/2006/relationships" xmlns:p="http://schemas.openxmlformats.org/presentationml/2006/main">
+  <p:cSld>
+    <p:spTree>
+      <p:nvGrpSpPr>
+        <p:cNvPr id="1" name="">
+          <a:extLst>
+            <a:ext uri="{FF2B5EF4-FFF2-40B4-BE49-F238E27FC236}">
+              <a16:creationId xmlns:a16="http://schemas.microsoft.com/office/drawing/2014/main" id="{F8EDEE9F-4514-2300-5A8D-DC50889D0BE4}"/>
+            </a:ext>
+          </a:extLst>
+        </p:cNvPr>
+        <p:cNvGrpSpPr/>
+        <p:nvPr/>
+      </p:nvGrpSpPr>
+      <p:grpSpPr>
+        <a:xfrm>
+          <a:off x="0" y="0"/>
+          <a:ext cx="0" cy="0"/>
+          <a:chOff x="0" y="0"/>
+          <a:chExt cx="0" cy="0"/>
+        </a:xfrm>
+      </p:grpSpPr>
+      <p:sp>
+        <p:nvSpPr>
+          <p:cNvPr id="2" name="Slide Image Placeholder 1">
+            <a:extLst>
+              <a:ext uri="{FF2B5EF4-FFF2-40B4-BE49-F238E27FC236}">
+                <a16:creationId xmlns:a16="http://schemas.microsoft.com/office/drawing/2014/main" id="{FF725C6D-2B49-40E0-C992-5277A6C12193}"/>
+              </a:ext>
+            </a:extLst>
+          </p:cNvPr>
+          <p:cNvSpPr>
+            <a:spLocks noGrp="1" noRot="1" noChangeAspect="1"/>
+          </p:cNvSpPr>
+          <p:nvPr>
+            <p:ph type="sldImg"/>
+          </p:nvPr>
+        </p:nvSpPr>
+        <p:spPr/>
+      </p:sp>
+      <p:sp>
+        <p:nvSpPr>
+          <p:cNvPr id="3" name="Notes Placeholder 2">
+            <a:extLst>
+              <a:ext uri="{FF2B5EF4-FFF2-40B4-BE49-F238E27FC236}">
+                <a16:creationId xmlns:a16="http://schemas.microsoft.com/office/drawing/2014/main" id="{A3CA838A-8510-E05A-F17D-2502067EFBFA}"/>
+              </a:ext>
+            </a:extLst>
+          </p:cNvPr>
+          <p:cNvSpPr>
+            <a:spLocks noGrp="1"/>
+          </p:cNvSpPr>
+          <p:nvPr>
+            <p:ph type="body" idx="1"/>
+          </p:nvPr>
+        </p:nvSpPr>
+        <p:spPr/>
+        <p:txBody>
+          <a:bodyPr/>
+          <a:lstStyle/>
+          <a:p>
+            <a:r>
+              <a:t>Host 是應用程式，並不是 LLM 本身。它整合互動、工具連線與執行流程；其中的 client 管理與 server 的 MCP 連線。Server 公開工具並執行要求。</a:t>
+            </a:r>
+          </a:p>
+          <a:p>
+            <a:r>
+              <a:t>論文圖 1 將 IDE、AI 助手與新 BEM 應用概括放在 Clients 區塊。講解時可區分完整應用 Host 與內部連線元件 Client，避免把模型和應用混為一談。</a:t>
+            </a:r>
+          </a:p>
+          <a:p>
+            <a:r>
+              <a:t>FastMCP 是作者用來建構 server 的框架。它負責協定與工具分派，modify_lights 等才是工具。來源：論文 Section 2.1、Fig.1；作者 server.py。</a:t>
+            </a:r>
+          </a:p>
+        </p:txBody>
+      </p:sp>
+      <p:sp>
+        <p:nvSpPr>
+          <p:cNvPr id="4" name="Slide Number Placeholder 3">
+            <a:extLst>
+              <a:ext uri="{FF2B5EF4-FFF2-40B4-BE49-F238E27FC236}">
+                <a16:creationId xmlns:a16="http://schemas.microsoft.com/office/drawing/2014/main" id="{42A00D94-90E7-67AD-AB51-0E5EC9D643E3}"/>
+              </a:ext>
+            </a:extLst>
+          </p:cNvPr>
+          <p:cNvSpPr>
+            <a:spLocks noGrp="1"/>
+          </p:cNvSpPr>
+          <p:nvPr>
+            <p:ph type="sldNum" idx="5"/>
+          </p:nvPr>
+        </p:nvSpPr>
+        <p:spPr/>
+        <p:txBody>
+          <a:bodyPr/>
+          <a:lstStyle/>
+          <a:p>
+            <a:endParaRPr/>
+          </a:p>
+        </p:txBody>
+      </p:sp>
+    </p:spTree>
+    <p:extLst>
+      <p:ext uri="{BB962C8B-B14F-4D97-AF65-F5344CB8AC3E}">
+        <p14:creationId xmlns:p14="http://schemas.microsoft.com/office/powerpoint/2010/main" val="3992029684"/>
+      </p:ext>
+    </p:extLst>
+  </p:cSld>
+  <p:clrMapOvr>
+    <a:masterClrMapping/>
+  </p:clrMapOvr>
+</p:notes>
+</file>
+
+<file path=ppt/notesSlides/notesSlide16.xml><?xml version="1.0" encoding="utf-8"?>
+<p:notes xmlns:a="http://schemas.openxmlformats.org/drawingml/2006/main" xmlns:r="http://schemas.openxmlformats.org/officeDocument/2006/relationships" xmlns:p="http://schemas.openxmlformats.org/presentationml/2006/main">
+  <p:cSld>
+    <p:spTree>
+      <p:nvGrpSpPr>
+        <p:cNvPr id="1" name="">
+          <a:extLst>
+            <a:ext uri="{FF2B5EF4-FFF2-40B4-BE49-F238E27FC236}">
+              <a16:creationId xmlns:a16="http://schemas.microsoft.com/office/drawing/2014/main" id="{8E512EF0-5D30-D3C4-AB0E-D73A25BB892E}"/>
+            </a:ext>
+          </a:extLst>
+        </p:cNvPr>
+        <p:cNvGrpSpPr/>
+        <p:nvPr/>
+      </p:nvGrpSpPr>
+      <p:grpSpPr>
+        <a:xfrm>
+          <a:off x="0" y="0"/>
+          <a:ext cx="0" cy="0"/>
+          <a:chOff x="0" y="0"/>
+          <a:chExt cx="0" cy="0"/>
+        </a:xfrm>
+      </p:grpSpPr>
+      <p:sp>
+        <p:nvSpPr>
+          <p:cNvPr id="2" name="Slide Image Placeholder 1">
+            <a:extLst>
+              <a:ext uri="{FF2B5EF4-FFF2-40B4-BE49-F238E27FC236}">
+                <a16:creationId xmlns:a16="http://schemas.microsoft.com/office/drawing/2014/main" id="{B93EEA3E-44E5-44DD-DABA-CC450739DE48}"/>
+              </a:ext>
+            </a:extLst>
+          </p:cNvPr>
+          <p:cNvSpPr>
+            <a:spLocks noGrp="1" noRot="1" noChangeAspect="1"/>
+          </p:cNvSpPr>
+          <p:nvPr>
+            <p:ph type="sldImg"/>
+          </p:nvPr>
+        </p:nvSpPr>
+        <p:spPr/>
+      </p:sp>
+      <p:sp>
+        <p:nvSpPr>
+          <p:cNvPr id="3" name="Notes Placeholder 2">
+            <a:extLst>
+              <a:ext uri="{FF2B5EF4-FFF2-40B4-BE49-F238E27FC236}">
+                <a16:creationId xmlns:a16="http://schemas.microsoft.com/office/drawing/2014/main" id="{C6731F00-1445-B68A-AC13-4A146659E6B5}"/>
+              </a:ext>
+            </a:extLst>
+          </p:cNvPr>
+          <p:cNvSpPr>
+            <a:spLocks noGrp="1"/>
+          </p:cNvSpPr>
+          <p:nvPr>
+            <p:ph type="body" idx="1"/>
+          </p:nvPr>
+        </p:nvSpPr>
+        <p:spPr/>
+        <p:txBody>
+          <a:bodyPr/>
+          <a:lstStyle/>
+          <a:p>
+            <a:r>
+              <a:t>Host 是應用程式，並不是 LLM 本身。它整合互動、工具連線與執行流程；其中的 client 管理與 server 的 MCP 連線。Server 公開工具並執行要求。</a:t>
+            </a:r>
+          </a:p>
+          <a:p>
+            <a:r>
+              <a:t>論文圖 1 將 IDE、AI 助手與新 BEM 應用概括放在 Clients 區塊。講解時可區分完整應用 Host 與內部連線元件 Client，避免把模型和應用混為一談。</a:t>
+            </a:r>
+          </a:p>
+          <a:p>
+            <a:r>
+              <a:t>FastMCP 是作者用來建構 server 的框架。它負責協定與工具分派，modify_lights 等才是工具。來源：論文 Section 2.1、Fig.1；作者 server.py。</a:t>
+            </a:r>
+          </a:p>
+        </p:txBody>
+      </p:sp>
+      <p:sp>
+        <p:nvSpPr>
+          <p:cNvPr id="4" name="Slide Number Placeholder 3">
+            <a:extLst>
+              <a:ext uri="{FF2B5EF4-FFF2-40B4-BE49-F238E27FC236}">
+                <a16:creationId xmlns:a16="http://schemas.microsoft.com/office/drawing/2014/main" id="{8E9773E1-80B2-404F-9D5A-13DE8D26EF6D}"/>
+              </a:ext>
+            </a:extLst>
+          </p:cNvPr>
+          <p:cNvSpPr>
+            <a:spLocks noGrp="1"/>
+          </p:cNvSpPr>
+          <p:nvPr>
+            <p:ph type="sldNum" idx="5"/>
+          </p:nvPr>
+        </p:nvSpPr>
+        <p:spPr/>
+        <p:txBody>
+          <a:bodyPr/>
+          <a:lstStyle/>
+          <a:p>
+            <a:endParaRPr/>
+          </a:p>
+        </p:txBody>
+      </p:sp>
+    </p:spTree>
+    <p:extLst>
+      <p:ext uri="{BB962C8B-B14F-4D97-AF65-F5344CB8AC3E}">
+        <p14:creationId xmlns:p14="http://schemas.microsoft.com/office/powerpoint/2010/main" val="1107342820"/>
+      </p:ext>
+    </p:extLst>
+  </p:cSld>
+  <p:clrMapOvr>
+    <a:masterClrMapping/>
+  </p:clrMapOvr>
+</p:notes>
+</file>
+
+<file path=ppt/notesSlides/notesSlide17.xml><?xml version="1.0" encoding="utf-8"?>
+<p:notes xmlns:a="http://schemas.openxmlformats.org/drawingml/2006/main" xmlns:r="http://schemas.openxmlformats.org/officeDocument/2006/relationships" xmlns:p="http://schemas.openxmlformats.org/presentationml/2006/main">
+  <p:cSld>
+    <p:spTree>
+      <p:nvGrpSpPr>
+        <p:cNvPr id="1" name="">
+          <a:extLst>
+            <a:ext uri="{FF2B5EF4-FFF2-40B4-BE49-F238E27FC236}">
+              <a16:creationId xmlns:a16="http://schemas.microsoft.com/office/drawing/2014/main" id="{0099FB13-4665-064B-6C95-FE677BCD20A7}"/>
+            </a:ext>
+          </a:extLst>
+        </p:cNvPr>
+        <p:cNvGrpSpPr/>
+        <p:nvPr/>
+      </p:nvGrpSpPr>
+      <p:grpSpPr>
+        <a:xfrm>
+          <a:off x="0" y="0"/>
+          <a:ext cx="0" cy="0"/>
+          <a:chOff x="0" y="0"/>
+          <a:chExt cx="0" cy="0"/>
+        </a:xfrm>
+      </p:grpSpPr>
+      <p:sp>
+        <p:nvSpPr>
+          <p:cNvPr id="2" name="Slide Image Placeholder 1">
+            <a:extLst>
+              <a:ext uri="{FF2B5EF4-FFF2-40B4-BE49-F238E27FC236}">
+                <a16:creationId xmlns:a16="http://schemas.microsoft.com/office/drawing/2014/main" id="{59FED029-1F14-3E99-C05F-93D0FD6A08F5}"/>
+              </a:ext>
+            </a:extLst>
+          </p:cNvPr>
+          <p:cNvSpPr>
+            <a:spLocks noGrp="1" noRot="1" noChangeAspect="1"/>
+          </p:cNvSpPr>
+          <p:nvPr>
+            <p:ph type="sldImg"/>
+          </p:nvPr>
+        </p:nvSpPr>
+        <p:spPr/>
+      </p:sp>
+      <p:sp>
+        <p:nvSpPr>
+          <p:cNvPr id="3" name="Notes Placeholder 2">
+            <a:extLst>
+              <a:ext uri="{FF2B5EF4-FFF2-40B4-BE49-F238E27FC236}">
+                <a16:creationId xmlns:a16="http://schemas.microsoft.com/office/drawing/2014/main" id="{F09A8EF4-0B58-BFD7-A436-26207424C07C}"/>
+              </a:ext>
+            </a:extLst>
+          </p:cNvPr>
+          <p:cNvSpPr>
+            <a:spLocks noGrp="1"/>
+          </p:cNvSpPr>
+          <p:nvPr>
+            <p:ph type="body" idx="1"/>
+          </p:nvPr>
+        </p:nvSpPr>
+        <p:spPr/>
+        <p:txBody>
+          <a:bodyPr/>
+          <a:lstStyle/>
+          <a:p>
+            <a:r>
+              <a:t>Host 是應用程式，並不是 LLM 本身。它整合互動、工具連線與執行流程；其中的 client 管理與 server 的 MCP 連線。Server 公開工具並執行要求。</a:t>
+            </a:r>
+          </a:p>
+          <a:p>
+            <a:r>
+              <a:t>論文圖 1 將 IDE、AI 助手與新 BEM 應用概括放在 Clients 區塊。講解時可區分完整應用 Host 與內部連線元件 Client，避免把模型和應用混為一談。</a:t>
+            </a:r>
+          </a:p>
+          <a:p>
+            <a:r>
+              <a:t>FastMCP 是作者用來建構 server 的框架。它負責協定與工具分派，modify_lights 等才是工具。來源：論文 Section 2.1、Fig.1；作者 server.py。</a:t>
+            </a:r>
+          </a:p>
+        </p:txBody>
+      </p:sp>
+      <p:sp>
+        <p:nvSpPr>
+          <p:cNvPr id="4" name="Slide Number Placeholder 3">
+            <a:extLst>
+              <a:ext uri="{FF2B5EF4-FFF2-40B4-BE49-F238E27FC236}">
+                <a16:creationId xmlns:a16="http://schemas.microsoft.com/office/drawing/2014/main" id="{62411DA1-6D9F-CA42-861A-7E043796EC41}"/>
+              </a:ext>
+            </a:extLst>
+          </p:cNvPr>
+          <p:cNvSpPr>
+            <a:spLocks noGrp="1"/>
+          </p:cNvSpPr>
+          <p:nvPr>
+            <p:ph type="sldNum" idx="5"/>
+          </p:nvPr>
+        </p:nvSpPr>
+        <p:spPr/>
+        <p:txBody>
+          <a:bodyPr/>
+          <a:lstStyle/>
+          <a:p>
+            <a:endParaRPr/>
+          </a:p>
+        </p:txBody>
+      </p:sp>
+    </p:spTree>
+    <p:extLst>
+      <p:ext uri="{BB962C8B-B14F-4D97-AF65-F5344CB8AC3E}">
+        <p14:creationId xmlns:p14="http://schemas.microsoft.com/office/powerpoint/2010/main" val="3819235962"/>
+      </p:ext>
+    </p:extLst>
   </p:cSld>
   <p:clrMapOvr>
     <a:masterClrMapping/>
@@ -12038,6 +12506,1916 @@
 </p:sld>
 </file>
 
+<file path=ppt/slides/slide14.xml><?xml version="1.0" encoding="utf-8"?>
+<p:sld xmlns:a="http://schemas.openxmlformats.org/drawingml/2006/main" xmlns:r="http://schemas.openxmlformats.org/officeDocument/2006/relationships" xmlns:p="http://schemas.openxmlformats.org/presentationml/2006/main">
+  <p:cSld>
+    <p:bg>
+      <p:bgPr>
+        <a:solidFill>
+          <a:srgbClr val="FFFFFF"/>
+        </a:solidFill>
+        <a:effectLst/>
+      </p:bgPr>
+    </p:bg>
+    <p:spTree>
+      <p:nvGrpSpPr>
+        <p:cNvPr id="1" name="">
+          <a:extLst>
+            <a:ext uri="{FF2B5EF4-FFF2-40B4-BE49-F238E27FC236}">
+              <a16:creationId xmlns:a16="http://schemas.microsoft.com/office/drawing/2014/main" id="{CDC86EA5-65E3-5A30-6E75-0B6F5AD6C7C1}"/>
+            </a:ext>
+          </a:extLst>
+        </p:cNvPr>
+        <p:cNvGrpSpPr/>
+        <p:nvPr/>
+      </p:nvGrpSpPr>
+      <p:grpSpPr>
+        <a:xfrm>
+          <a:off x="0" y="0"/>
+          <a:ext cx="0" cy="0"/>
+          <a:chOff x="0" y="0"/>
+          <a:chExt cx="0" cy="0"/>
+        </a:xfrm>
+      </p:grpSpPr>
+      <p:sp>
+        <p:nvSpPr>
+          <p:cNvPr id="7" name="矩形 6">
+            <a:extLst>
+              <a:ext uri="{FF2B5EF4-FFF2-40B4-BE49-F238E27FC236}">
+                <a16:creationId xmlns:a16="http://schemas.microsoft.com/office/drawing/2014/main" id="{CC16DAD5-76B8-09D3-D0C4-588EF77B9907}"/>
+              </a:ext>
+            </a:extLst>
+          </p:cNvPr>
+          <p:cNvSpPr>
+            <a:spLocks noGrp="1"/>
+          </p:cNvSpPr>
+          <p:nvPr/>
+        </p:nvSpPr>
+        <p:spPr>
+          <a:xfrm>
+            <a:off x="609600" y="285750"/>
+            <a:ext cx="10763250" cy="266700"/>
+          </a:xfrm>
+          <a:prstGeom prst="rect">
+            <a:avLst/>
+          </a:prstGeom>
+          <a:noFill/>
+          <a:ln w="0">
+            <a:noFill/>
+          </a:ln>
+        </p:spPr>
+        <p:txBody>
+          <a:bodyPr/>
+          <a:lstStyle>
+            <a:defPPr>
+              <a:defRPr sz="1425" b="1">
+                <a:solidFill>
+                  <a:srgbClr val="007C83"/>
+                </a:solidFill>
+                <a:latin typeface="Microsoft JhengHei"/>
+                <a:ea typeface="Microsoft JhengHei"/>
+                <a:cs typeface="Microsoft JhengHei"/>
+              </a:defRPr>
+            </a:defPPr>
+            <a:lvl1pPr>
+              <a:defRPr sz="1425" b="1">
+                <a:solidFill>
+                  <a:srgbClr val="007C83"/>
+                </a:solidFill>
+                <a:latin typeface="Microsoft JhengHei"/>
+                <a:ea typeface="Microsoft JhengHei"/>
+                <a:cs typeface="Microsoft JhengHei"/>
+              </a:defRPr>
+            </a:lvl1pPr>
+            <a:lvl2pPr>
+              <a:defRPr sz="1425" b="1">
+                <a:solidFill>
+                  <a:srgbClr val="007C83"/>
+                </a:solidFill>
+                <a:latin typeface="Microsoft JhengHei"/>
+                <a:ea typeface="Microsoft JhengHei"/>
+                <a:cs typeface="Microsoft JhengHei"/>
+              </a:defRPr>
+            </a:lvl2pPr>
+            <a:lvl3pPr>
+              <a:defRPr sz="1425" b="1">
+                <a:solidFill>
+                  <a:srgbClr val="007C83"/>
+                </a:solidFill>
+                <a:latin typeface="Microsoft JhengHei"/>
+                <a:ea typeface="Microsoft JhengHei"/>
+                <a:cs typeface="Microsoft JhengHei"/>
+              </a:defRPr>
+            </a:lvl3pPr>
+            <a:lvl4pPr>
+              <a:defRPr sz="1425" b="1">
+                <a:solidFill>
+                  <a:srgbClr val="007C83"/>
+                </a:solidFill>
+                <a:latin typeface="Microsoft JhengHei"/>
+                <a:ea typeface="Microsoft JhengHei"/>
+                <a:cs typeface="Microsoft JhengHei"/>
+              </a:defRPr>
+            </a:lvl4pPr>
+            <a:lvl5pPr>
+              <a:defRPr sz="1425" b="1">
+                <a:solidFill>
+                  <a:srgbClr val="007C83"/>
+                </a:solidFill>
+                <a:latin typeface="Microsoft JhengHei"/>
+                <a:ea typeface="Microsoft JhengHei"/>
+                <a:cs typeface="Microsoft JhengHei"/>
+              </a:defRPr>
+            </a:lvl5pPr>
+            <a:lvl6pPr>
+              <a:defRPr sz="1425" b="1">
+                <a:solidFill>
+                  <a:srgbClr val="007C83"/>
+                </a:solidFill>
+                <a:latin typeface="Microsoft JhengHei"/>
+                <a:ea typeface="Microsoft JhengHei"/>
+                <a:cs typeface="Microsoft JhengHei"/>
+              </a:defRPr>
+            </a:lvl6pPr>
+            <a:lvl7pPr>
+              <a:defRPr sz="1425" b="1">
+                <a:solidFill>
+                  <a:srgbClr val="007C83"/>
+                </a:solidFill>
+                <a:latin typeface="Microsoft JhengHei"/>
+                <a:ea typeface="Microsoft JhengHei"/>
+                <a:cs typeface="Microsoft JhengHei"/>
+              </a:defRPr>
+            </a:lvl7pPr>
+            <a:lvl8pPr>
+              <a:defRPr sz="1425" b="1">
+                <a:solidFill>
+                  <a:srgbClr val="007C83"/>
+                </a:solidFill>
+                <a:latin typeface="Microsoft JhengHei"/>
+                <a:ea typeface="Microsoft JhengHei"/>
+                <a:cs typeface="Microsoft JhengHei"/>
+              </a:defRPr>
+            </a:lvl8pPr>
+            <a:lvl9pPr>
+              <a:defRPr sz="1425" b="1">
+                <a:solidFill>
+                  <a:srgbClr val="007C83"/>
+                </a:solidFill>
+                <a:latin typeface="Microsoft JhengHei"/>
+                <a:ea typeface="Microsoft JhengHei"/>
+                <a:cs typeface="Microsoft JhengHei"/>
+              </a:defRPr>
+            </a:lvl9pPr>
+          </a:lstStyle>
+          <a:p>
+            <a:pPr>
+              <a:defRPr sz="1425" b="1">
+                <a:solidFill>
+                  <a:srgbClr val="007C83"/>
+                </a:solidFill>
+                <a:latin typeface="Microsoft JhengHei"/>
+                <a:ea typeface="Microsoft JhengHei"/>
+                <a:cs typeface="Microsoft JhengHei"/>
+              </a:defRPr>
+            </a:pPr>
+            <a:r>
+              <a:rPr sz="1425" b="1">
+                <a:solidFill>
+                  <a:srgbClr val="007C83"/>
+                </a:solidFill>
+                <a:latin typeface="Microsoft JhengHei"/>
+                <a:ea typeface="Microsoft JhengHei"/>
+                <a:cs typeface="Microsoft JhengHei"/>
+              </a:rPr>
+              <a:t>03  /  系統角色</a:t>
+            </a:r>
+          </a:p>
+        </p:txBody>
+      </p:sp>
+      <p:sp>
+        <p:nvSpPr>
+          <p:cNvPr id="4" name="矩形 3">
+            <a:extLst>
+              <a:ext uri="{FF2B5EF4-FFF2-40B4-BE49-F238E27FC236}">
+                <a16:creationId xmlns:a16="http://schemas.microsoft.com/office/drawing/2014/main" id="{BC0D28DB-68C1-CE0A-E588-C09EE4CC7A7E}"/>
+              </a:ext>
+            </a:extLst>
+          </p:cNvPr>
+          <p:cNvSpPr>
+            <a:spLocks noGrp="1"/>
+          </p:cNvSpPr>
+          <p:nvPr/>
+        </p:nvSpPr>
+        <p:spPr>
+          <a:xfrm>
+            <a:off x="10953750" y="6419850"/>
+            <a:ext cx="628650" cy="228600"/>
+          </a:xfrm>
+          <a:prstGeom prst="rect">
+            <a:avLst/>
+          </a:prstGeom>
+          <a:noFill/>
+          <a:ln w="0">
+            <a:noFill/>
+          </a:ln>
+        </p:spPr>
+        <p:txBody>
+          <a:bodyPr/>
+          <a:lstStyle>
+            <a:defPPr>
+              <a:defRPr sz="1200" b="0">
+                <a:solidFill>
+                  <a:srgbClr val="4D6475"/>
+                </a:solidFill>
+                <a:latin typeface="Microsoft JhengHei"/>
+                <a:ea typeface="Microsoft JhengHei"/>
+                <a:cs typeface="Microsoft JhengHei"/>
+              </a:defRPr>
+            </a:defPPr>
+            <a:lvl1pPr>
+              <a:defRPr sz="1200" b="0">
+                <a:solidFill>
+                  <a:srgbClr val="4D6475"/>
+                </a:solidFill>
+                <a:latin typeface="Microsoft JhengHei"/>
+                <a:ea typeface="Microsoft JhengHei"/>
+                <a:cs typeface="Microsoft JhengHei"/>
+              </a:defRPr>
+            </a:lvl1pPr>
+            <a:lvl2pPr>
+              <a:defRPr sz="1200" b="0">
+                <a:solidFill>
+                  <a:srgbClr val="4D6475"/>
+                </a:solidFill>
+                <a:latin typeface="Microsoft JhengHei"/>
+                <a:ea typeface="Microsoft JhengHei"/>
+                <a:cs typeface="Microsoft JhengHei"/>
+              </a:defRPr>
+            </a:lvl2pPr>
+            <a:lvl3pPr>
+              <a:defRPr sz="1200" b="0">
+                <a:solidFill>
+                  <a:srgbClr val="4D6475"/>
+                </a:solidFill>
+                <a:latin typeface="Microsoft JhengHei"/>
+                <a:ea typeface="Microsoft JhengHei"/>
+                <a:cs typeface="Microsoft JhengHei"/>
+              </a:defRPr>
+            </a:lvl3pPr>
+            <a:lvl4pPr>
+              <a:defRPr sz="1200" b="0">
+                <a:solidFill>
+                  <a:srgbClr val="4D6475"/>
+                </a:solidFill>
+                <a:latin typeface="Microsoft JhengHei"/>
+                <a:ea typeface="Microsoft JhengHei"/>
+                <a:cs typeface="Microsoft JhengHei"/>
+              </a:defRPr>
+            </a:lvl4pPr>
+            <a:lvl5pPr>
+              <a:defRPr sz="1200" b="0">
+                <a:solidFill>
+                  <a:srgbClr val="4D6475"/>
+                </a:solidFill>
+                <a:latin typeface="Microsoft JhengHei"/>
+                <a:ea typeface="Microsoft JhengHei"/>
+                <a:cs typeface="Microsoft JhengHei"/>
+              </a:defRPr>
+            </a:lvl5pPr>
+            <a:lvl6pPr>
+              <a:defRPr sz="1200" b="0">
+                <a:solidFill>
+                  <a:srgbClr val="4D6475"/>
+                </a:solidFill>
+                <a:latin typeface="Microsoft JhengHei"/>
+                <a:ea typeface="Microsoft JhengHei"/>
+                <a:cs typeface="Microsoft JhengHei"/>
+              </a:defRPr>
+            </a:lvl6pPr>
+            <a:lvl7pPr>
+              <a:defRPr sz="1200" b="0">
+                <a:solidFill>
+                  <a:srgbClr val="4D6475"/>
+                </a:solidFill>
+                <a:latin typeface="Microsoft JhengHei"/>
+                <a:ea typeface="Microsoft JhengHei"/>
+                <a:cs typeface="Microsoft JhengHei"/>
+              </a:defRPr>
+            </a:lvl7pPr>
+            <a:lvl8pPr>
+              <a:defRPr sz="1200" b="0">
+                <a:solidFill>
+                  <a:srgbClr val="4D6475"/>
+                </a:solidFill>
+                <a:latin typeface="Microsoft JhengHei"/>
+                <a:ea typeface="Microsoft JhengHei"/>
+                <a:cs typeface="Microsoft JhengHei"/>
+              </a:defRPr>
+            </a:lvl8pPr>
+            <a:lvl9pPr>
+              <a:defRPr sz="1200" b="0">
+                <a:solidFill>
+                  <a:srgbClr val="4D6475"/>
+                </a:solidFill>
+                <a:latin typeface="Microsoft JhengHei"/>
+                <a:ea typeface="Microsoft JhengHei"/>
+                <a:cs typeface="Microsoft JhengHei"/>
+              </a:defRPr>
+            </a:lvl9pPr>
+          </a:lstStyle>
+          <a:p>
+            <a:pPr>
+              <a:defRPr sz="1200" b="0">
+                <a:solidFill>
+                  <a:srgbClr val="4D6475"/>
+                </a:solidFill>
+                <a:latin typeface="Microsoft JhengHei"/>
+                <a:ea typeface="Microsoft JhengHei"/>
+                <a:cs typeface="Microsoft JhengHei"/>
+              </a:defRPr>
+            </a:pPr>
+            <a:r>
+              <a:rPr sz="1200" b="0">
+                <a:solidFill>
+                  <a:srgbClr val="4D6475"/>
+                </a:solidFill>
+                <a:latin typeface="Microsoft JhengHei"/>
+                <a:ea typeface="Microsoft JhengHei"/>
+                <a:cs typeface="Microsoft JhengHei"/>
+              </a:rPr>
+              <a:t>04</a:t>
+            </a:r>
+          </a:p>
+        </p:txBody>
+      </p:sp>
+      <p:pic>
+        <p:nvPicPr>
+          <p:cNvPr id="8" name="圖片 7">
+            <a:extLst>
+              <a:ext uri="{FF2B5EF4-FFF2-40B4-BE49-F238E27FC236}">
+                <a16:creationId xmlns:a16="http://schemas.microsoft.com/office/drawing/2014/main" id="{60887D11-35E7-B1C6-30D7-001AD8565D35}"/>
+              </a:ext>
+            </a:extLst>
+          </p:cNvPr>
+          <p:cNvPicPr>
+            <a:picLocks noChangeAspect="1"/>
+          </p:cNvPicPr>
+          <p:nvPr/>
+        </p:nvPicPr>
+        <p:blipFill>
+          <a:blip r:embed="rId3"/>
+          <a:stretch>
+            <a:fillRect/>
+          </a:stretch>
+        </p:blipFill>
+        <p:spPr>
+          <a:xfrm>
+            <a:off x="2909887" y="260852"/>
+            <a:ext cx="6372225" cy="6162675"/>
+          </a:xfrm>
+          <a:prstGeom prst="rect">
+            <a:avLst/>
+          </a:prstGeom>
+        </p:spPr>
+      </p:pic>
+      <p:cxnSp>
+        <p:nvCxnSpPr>
+          <p:cNvPr id="3" name="直線單箭頭接點 2">
+            <a:extLst>
+              <a:ext uri="{FF2B5EF4-FFF2-40B4-BE49-F238E27FC236}">
+                <a16:creationId xmlns:a16="http://schemas.microsoft.com/office/drawing/2014/main" id="{D911B634-FD65-F4E0-B522-3770C6D97511}"/>
+              </a:ext>
+            </a:extLst>
+          </p:cNvPr>
+          <p:cNvCxnSpPr/>
+          <p:nvPr/>
+        </p:nvCxnSpPr>
+        <p:spPr>
+          <a:xfrm flipV="1">
+            <a:off x="7472516" y="454742"/>
+            <a:ext cx="2593258" cy="12290"/>
+          </a:xfrm>
+          <a:prstGeom prst="straightConnector1">
+            <a:avLst/>
+          </a:prstGeom>
+          <a:ln w="57150">
+            <a:solidFill>
+              <a:srgbClr val="C00000"/>
+            </a:solidFill>
+            <a:tailEnd type="triangle"/>
+          </a:ln>
+        </p:spPr>
+        <p:style>
+          <a:lnRef idx="3">
+            <a:schemeClr val="accent3"/>
+          </a:lnRef>
+          <a:fillRef idx="0">
+            <a:schemeClr val="accent3"/>
+          </a:fillRef>
+          <a:effectRef idx="2">
+            <a:schemeClr val="accent3"/>
+          </a:effectRef>
+          <a:fontRef idx="minor">
+            <a:schemeClr val="tx1"/>
+          </a:fontRef>
+        </p:style>
+      </p:cxnSp>
+      <p:sp>
+        <p:nvSpPr>
+          <p:cNvPr id="6" name="文字方塊 5">
+            <a:extLst>
+              <a:ext uri="{FF2B5EF4-FFF2-40B4-BE49-F238E27FC236}">
+                <a16:creationId xmlns:a16="http://schemas.microsoft.com/office/drawing/2014/main" id="{68A4A9A8-3D53-2453-86C6-5A16BA209A5E}"/>
+              </a:ext>
+            </a:extLst>
+          </p:cNvPr>
+          <p:cNvSpPr txBox="1"/>
+          <p:nvPr/>
+        </p:nvSpPr>
+        <p:spPr>
+          <a:xfrm>
+            <a:off x="9967452" y="282677"/>
+            <a:ext cx="6096000" cy="669414"/>
+          </a:xfrm>
+          <a:prstGeom prst="rect">
+            <a:avLst/>
+          </a:prstGeom>
+          <a:noFill/>
+        </p:spPr>
+        <p:txBody>
+          <a:bodyPr rot="0" spcFirstLastPara="0" vertOverflow="overflow" horzOverflow="overflow" vert="horz" wrap="square" lIns="91440" tIns="45720" rIns="91440" bIns="45720" numCol="1" spcCol="0" rtlCol="0" fromWordArt="0" anchor="t" anchorCtr="0" forceAA="0" compatLnSpc="1">
+            <a:prstTxWarp prst="textNoShape">
+              <a:avLst/>
+            </a:prstTxWarp>
+            <a:spAutoFit/>
+          </a:bodyPr>
+          <a:lstStyle/>
+          <a:p>
+            <a:r>
+              <a:rPr lang="en-US" sz="1950" b="0" i="0" baseline="0">
+                <a:solidFill>
+                  <a:srgbClr val="132C44"/>
+                </a:solidFill>
+                <a:latin typeface="Microsoft JhengHei"/>
+              </a:rPr>
+              <a:t>決定工具與參數</a:t>
+            </a:r>
+            <a:endParaRPr lang="zh-TW" altLang="en-US"/>
+          </a:p>
+          <a:p>
+            <a:pPr algn="ctr"/>
+            <a:endParaRPr lang="zh-TW" altLang="en-US"/>
+          </a:p>
+        </p:txBody>
+      </p:sp>
+    </p:spTree>
+    <p:extLst>
+      <p:ext uri="{BB962C8B-B14F-4D97-AF65-F5344CB8AC3E}">
+        <p14:creationId xmlns:p14="http://schemas.microsoft.com/office/powerpoint/2010/main" val="981859220"/>
+      </p:ext>
+    </p:extLst>
+  </p:cSld>
+  <p:clrMapOvr>
+    <a:masterClrMapping/>
+  </p:clrMapOvr>
+</p:sld>
+</file>
+
+<file path=ppt/slides/slide15.xml><?xml version="1.0" encoding="utf-8"?>
+<p:sld xmlns:a="http://schemas.openxmlformats.org/drawingml/2006/main" xmlns:r="http://schemas.openxmlformats.org/officeDocument/2006/relationships" xmlns:p="http://schemas.openxmlformats.org/presentationml/2006/main">
+  <p:cSld>
+    <p:bg>
+      <p:bgPr>
+        <a:solidFill>
+          <a:srgbClr val="FFFFFF"/>
+        </a:solidFill>
+        <a:effectLst/>
+      </p:bgPr>
+    </p:bg>
+    <p:spTree>
+      <p:nvGrpSpPr>
+        <p:cNvPr id="1" name="">
+          <a:extLst>
+            <a:ext uri="{FF2B5EF4-FFF2-40B4-BE49-F238E27FC236}">
+              <a16:creationId xmlns:a16="http://schemas.microsoft.com/office/drawing/2014/main" id="{5307ABD0-7FDE-8221-1D87-35A33DABF317}"/>
+            </a:ext>
+          </a:extLst>
+        </p:cNvPr>
+        <p:cNvGrpSpPr/>
+        <p:nvPr/>
+      </p:nvGrpSpPr>
+      <p:grpSpPr>
+        <a:xfrm>
+          <a:off x="0" y="0"/>
+          <a:ext cx="0" cy="0"/>
+          <a:chOff x="0" y="0"/>
+          <a:chExt cx="0" cy="0"/>
+        </a:xfrm>
+      </p:grpSpPr>
+      <p:sp>
+        <p:nvSpPr>
+          <p:cNvPr id="7" name="矩形 6">
+            <a:extLst>
+              <a:ext uri="{FF2B5EF4-FFF2-40B4-BE49-F238E27FC236}">
+                <a16:creationId xmlns:a16="http://schemas.microsoft.com/office/drawing/2014/main" id="{67484C88-728B-BADA-6063-9BE601E54817}"/>
+              </a:ext>
+            </a:extLst>
+          </p:cNvPr>
+          <p:cNvSpPr>
+            <a:spLocks noGrp="1"/>
+          </p:cNvSpPr>
+          <p:nvPr/>
+        </p:nvSpPr>
+        <p:spPr>
+          <a:xfrm>
+            <a:off x="609600" y="285750"/>
+            <a:ext cx="10763250" cy="266700"/>
+          </a:xfrm>
+          <a:prstGeom prst="rect">
+            <a:avLst/>
+          </a:prstGeom>
+          <a:noFill/>
+          <a:ln w="0">
+            <a:noFill/>
+          </a:ln>
+        </p:spPr>
+        <p:txBody>
+          <a:bodyPr/>
+          <a:lstStyle>
+            <a:defPPr>
+              <a:defRPr sz="1425" b="1">
+                <a:solidFill>
+                  <a:srgbClr val="007C83"/>
+                </a:solidFill>
+                <a:latin typeface="Microsoft JhengHei"/>
+                <a:ea typeface="Microsoft JhengHei"/>
+                <a:cs typeface="Microsoft JhengHei"/>
+              </a:defRPr>
+            </a:defPPr>
+            <a:lvl1pPr>
+              <a:defRPr sz="1425" b="1">
+                <a:solidFill>
+                  <a:srgbClr val="007C83"/>
+                </a:solidFill>
+                <a:latin typeface="Microsoft JhengHei"/>
+                <a:ea typeface="Microsoft JhengHei"/>
+                <a:cs typeface="Microsoft JhengHei"/>
+              </a:defRPr>
+            </a:lvl1pPr>
+            <a:lvl2pPr>
+              <a:defRPr sz="1425" b="1">
+                <a:solidFill>
+                  <a:srgbClr val="007C83"/>
+                </a:solidFill>
+                <a:latin typeface="Microsoft JhengHei"/>
+                <a:ea typeface="Microsoft JhengHei"/>
+                <a:cs typeface="Microsoft JhengHei"/>
+              </a:defRPr>
+            </a:lvl2pPr>
+            <a:lvl3pPr>
+              <a:defRPr sz="1425" b="1">
+                <a:solidFill>
+                  <a:srgbClr val="007C83"/>
+                </a:solidFill>
+                <a:latin typeface="Microsoft JhengHei"/>
+                <a:ea typeface="Microsoft JhengHei"/>
+                <a:cs typeface="Microsoft JhengHei"/>
+              </a:defRPr>
+            </a:lvl3pPr>
+            <a:lvl4pPr>
+              <a:defRPr sz="1425" b="1">
+                <a:solidFill>
+                  <a:srgbClr val="007C83"/>
+                </a:solidFill>
+                <a:latin typeface="Microsoft JhengHei"/>
+                <a:ea typeface="Microsoft JhengHei"/>
+                <a:cs typeface="Microsoft JhengHei"/>
+              </a:defRPr>
+            </a:lvl4pPr>
+            <a:lvl5pPr>
+              <a:defRPr sz="1425" b="1">
+                <a:solidFill>
+                  <a:srgbClr val="007C83"/>
+                </a:solidFill>
+                <a:latin typeface="Microsoft JhengHei"/>
+                <a:ea typeface="Microsoft JhengHei"/>
+                <a:cs typeface="Microsoft JhengHei"/>
+              </a:defRPr>
+            </a:lvl5pPr>
+            <a:lvl6pPr>
+              <a:defRPr sz="1425" b="1">
+                <a:solidFill>
+                  <a:srgbClr val="007C83"/>
+                </a:solidFill>
+                <a:latin typeface="Microsoft JhengHei"/>
+                <a:ea typeface="Microsoft JhengHei"/>
+                <a:cs typeface="Microsoft JhengHei"/>
+              </a:defRPr>
+            </a:lvl6pPr>
+            <a:lvl7pPr>
+              <a:defRPr sz="1425" b="1">
+                <a:solidFill>
+                  <a:srgbClr val="007C83"/>
+                </a:solidFill>
+                <a:latin typeface="Microsoft JhengHei"/>
+                <a:ea typeface="Microsoft JhengHei"/>
+                <a:cs typeface="Microsoft JhengHei"/>
+              </a:defRPr>
+            </a:lvl7pPr>
+            <a:lvl8pPr>
+              <a:defRPr sz="1425" b="1">
+                <a:solidFill>
+                  <a:srgbClr val="007C83"/>
+                </a:solidFill>
+                <a:latin typeface="Microsoft JhengHei"/>
+                <a:ea typeface="Microsoft JhengHei"/>
+                <a:cs typeface="Microsoft JhengHei"/>
+              </a:defRPr>
+            </a:lvl8pPr>
+            <a:lvl9pPr>
+              <a:defRPr sz="1425" b="1">
+                <a:solidFill>
+                  <a:srgbClr val="007C83"/>
+                </a:solidFill>
+                <a:latin typeface="Microsoft JhengHei"/>
+                <a:ea typeface="Microsoft JhengHei"/>
+                <a:cs typeface="Microsoft JhengHei"/>
+              </a:defRPr>
+            </a:lvl9pPr>
+          </a:lstStyle>
+          <a:p>
+            <a:pPr>
+              <a:defRPr sz="1425" b="1">
+                <a:solidFill>
+                  <a:srgbClr val="007C83"/>
+                </a:solidFill>
+                <a:latin typeface="Microsoft JhengHei"/>
+                <a:ea typeface="Microsoft JhengHei"/>
+                <a:cs typeface="Microsoft JhengHei"/>
+              </a:defRPr>
+            </a:pPr>
+            <a:r>
+              <a:rPr sz="1425" b="1">
+                <a:solidFill>
+                  <a:srgbClr val="007C83"/>
+                </a:solidFill>
+                <a:latin typeface="Microsoft JhengHei"/>
+                <a:ea typeface="Microsoft JhengHei"/>
+                <a:cs typeface="Microsoft JhengHei"/>
+              </a:rPr>
+              <a:t>03  /  系統角色</a:t>
+            </a:r>
+          </a:p>
+        </p:txBody>
+      </p:sp>
+      <p:sp>
+        <p:nvSpPr>
+          <p:cNvPr id="4" name="矩形 3">
+            <a:extLst>
+              <a:ext uri="{FF2B5EF4-FFF2-40B4-BE49-F238E27FC236}">
+                <a16:creationId xmlns:a16="http://schemas.microsoft.com/office/drawing/2014/main" id="{2D7F2785-1784-9E50-59D9-6016C4BF8D4A}"/>
+              </a:ext>
+            </a:extLst>
+          </p:cNvPr>
+          <p:cNvSpPr>
+            <a:spLocks noGrp="1"/>
+          </p:cNvSpPr>
+          <p:nvPr/>
+        </p:nvSpPr>
+        <p:spPr>
+          <a:xfrm>
+            <a:off x="10953750" y="6419850"/>
+            <a:ext cx="628650" cy="228600"/>
+          </a:xfrm>
+          <a:prstGeom prst="rect">
+            <a:avLst/>
+          </a:prstGeom>
+          <a:noFill/>
+          <a:ln w="0">
+            <a:noFill/>
+          </a:ln>
+        </p:spPr>
+        <p:txBody>
+          <a:bodyPr/>
+          <a:lstStyle>
+            <a:defPPr>
+              <a:defRPr sz="1200" b="0">
+                <a:solidFill>
+                  <a:srgbClr val="4D6475"/>
+                </a:solidFill>
+                <a:latin typeface="Microsoft JhengHei"/>
+                <a:ea typeface="Microsoft JhengHei"/>
+                <a:cs typeface="Microsoft JhengHei"/>
+              </a:defRPr>
+            </a:defPPr>
+            <a:lvl1pPr>
+              <a:defRPr sz="1200" b="0">
+                <a:solidFill>
+                  <a:srgbClr val="4D6475"/>
+                </a:solidFill>
+                <a:latin typeface="Microsoft JhengHei"/>
+                <a:ea typeface="Microsoft JhengHei"/>
+                <a:cs typeface="Microsoft JhengHei"/>
+              </a:defRPr>
+            </a:lvl1pPr>
+            <a:lvl2pPr>
+              <a:defRPr sz="1200" b="0">
+                <a:solidFill>
+                  <a:srgbClr val="4D6475"/>
+                </a:solidFill>
+                <a:latin typeface="Microsoft JhengHei"/>
+                <a:ea typeface="Microsoft JhengHei"/>
+                <a:cs typeface="Microsoft JhengHei"/>
+              </a:defRPr>
+            </a:lvl2pPr>
+            <a:lvl3pPr>
+              <a:defRPr sz="1200" b="0">
+                <a:solidFill>
+                  <a:srgbClr val="4D6475"/>
+                </a:solidFill>
+                <a:latin typeface="Microsoft JhengHei"/>
+                <a:ea typeface="Microsoft JhengHei"/>
+                <a:cs typeface="Microsoft JhengHei"/>
+              </a:defRPr>
+            </a:lvl3pPr>
+            <a:lvl4pPr>
+              <a:defRPr sz="1200" b="0">
+                <a:solidFill>
+                  <a:srgbClr val="4D6475"/>
+                </a:solidFill>
+                <a:latin typeface="Microsoft JhengHei"/>
+                <a:ea typeface="Microsoft JhengHei"/>
+                <a:cs typeface="Microsoft JhengHei"/>
+              </a:defRPr>
+            </a:lvl4pPr>
+            <a:lvl5pPr>
+              <a:defRPr sz="1200" b="0">
+                <a:solidFill>
+                  <a:srgbClr val="4D6475"/>
+                </a:solidFill>
+                <a:latin typeface="Microsoft JhengHei"/>
+                <a:ea typeface="Microsoft JhengHei"/>
+                <a:cs typeface="Microsoft JhengHei"/>
+              </a:defRPr>
+            </a:lvl5pPr>
+            <a:lvl6pPr>
+              <a:defRPr sz="1200" b="0">
+                <a:solidFill>
+                  <a:srgbClr val="4D6475"/>
+                </a:solidFill>
+                <a:latin typeface="Microsoft JhengHei"/>
+                <a:ea typeface="Microsoft JhengHei"/>
+                <a:cs typeface="Microsoft JhengHei"/>
+              </a:defRPr>
+            </a:lvl6pPr>
+            <a:lvl7pPr>
+              <a:defRPr sz="1200" b="0">
+                <a:solidFill>
+                  <a:srgbClr val="4D6475"/>
+                </a:solidFill>
+                <a:latin typeface="Microsoft JhengHei"/>
+                <a:ea typeface="Microsoft JhengHei"/>
+                <a:cs typeface="Microsoft JhengHei"/>
+              </a:defRPr>
+            </a:lvl7pPr>
+            <a:lvl8pPr>
+              <a:defRPr sz="1200" b="0">
+                <a:solidFill>
+                  <a:srgbClr val="4D6475"/>
+                </a:solidFill>
+                <a:latin typeface="Microsoft JhengHei"/>
+                <a:ea typeface="Microsoft JhengHei"/>
+                <a:cs typeface="Microsoft JhengHei"/>
+              </a:defRPr>
+            </a:lvl8pPr>
+            <a:lvl9pPr>
+              <a:defRPr sz="1200" b="0">
+                <a:solidFill>
+                  <a:srgbClr val="4D6475"/>
+                </a:solidFill>
+                <a:latin typeface="Microsoft JhengHei"/>
+                <a:ea typeface="Microsoft JhengHei"/>
+                <a:cs typeface="Microsoft JhengHei"/>
+              </a:defRPr>
+            </a:lvl9pPr>
+          </a:lstStyle>
+          <a:p>
+            <a:pPr>
+              <a:defRPr sz="1200" b="0">
+                <a:solidFill>
+                  <a:srgbClr val="4D6475"/>
+                </a:solidFill>
+                <a:latin typeface="Microsoft JhengHei"/>
+                <a:ea typeface="Microsoft JhengHei"/>
+                <a:cs typeface="Microsoft JhengHei"/>
+              </a:defRPr>
+            </a:pPr>
+            <a:r>
+              <a:rPr sz="1200" b="0">
+                <a:solidFill>
+                  <a:srgbClr val="4D6475"/>
+                </a:solidFill>
+                <a:latin typeface="Microsoft JhengHei"/>
+                <a:ea typeface="Microsoft JhengHei"/>
+                <a:cs typeface="Microsoft JhengHei"/>
+              </a:rPr>
+              <a:t>04</a:t>
+            </a:r>
+          </a:p>
+        </p:txBody>
+      </p:sp>
+      <p:pic>
+        <p:nvPicPr>
+          <p:cNvPr id="8" name="圖片 7">
+            <a:extLst>
+              <a:ext uri="{FF2B5EF4-FFF2-40B4-BE49-F238E27FC236}">
+                <a16:creationId xmlns:a16="http://schemas.microsoft.com/office/drawing/2014/main" id="{7EB93F71-2CDA-F546-F110-BB81AE1AB1EC}"/>
+              </a:ext>
+            </a:extLst>
+          </p:cNvPr>
+          <p:cNvPicPr>
+            <a:picLocks noChangeAspect="1"/>
+          </p:cNvPicPr>
+          <p:nvPr/>
+        </p:nvPicPr>
+        <p:blipFill>
+          <a:blip r:embed="rId3"/>
+          <a:stretch>
+            <a:fillRect/>
+          </a:stretch>
+        </p:blipFill>
+        <p:spPr>
+          <a:xfrm>
+            <a:off x="2909887" y="260852"/>
+            <a:ext cx="6372225" cy="6162675"/>
+          </a:xfrm>
+          <a:prstGeom prst="rect">
+            <a:avLst/>
+          </a:prstGeom>
+        </p:spPr>
+      </p:pic>
+      <p:cxnSp>
+        <p:nvCxnSpPr>
+          <p:cNvPr id="5" name="直線單箭頭接點 4">
+            <a:extLst>
+              <a:ext uri="{FF2B5EF4-FFF2-40B4-BE49-F238E27FC236}">
+                <a16:creationId xmlns:a16="http://schemas.microsoft.com/office/drawing/2014/main" id="{FFAA7462-6EF3-AD06-F5DE-9A9089351347}"/>
+              </a:ext>
+            </a:extLst>
+          </p:cNvPr>
+          <p:cNvCxnSpPr>
+            <a:cxnSpLocks/>
+          </p:cNvCxnSpPr>
+          <p:nvPr/>
+        </p:nvCxnSpPr>
+        <p:spPr>
+          <a:xfrm flipV="1">
+            <a:off x="6882579" y="1401096"/>
+            <a:ext cx="2593258" cy="12290"/>
+          </a:xfrm>
+          <a:prstGeom prst="straightConnector1">
+            <a:avLst/>
+          </a:prstGeom>
+          <a:ln w="57150">
+            <a:solidFill>
+              <a:srgbClr val="C00000"/>
+            </a:solidFill>
+            <a:tailEnd type="triangle"/>
+          </a:ln>
+        </p:spPr>
+        <p:style>
+          <a:lnRef idx="3">
+            <a:schemeClr val="accent3"/>
+          </a:lnRef>
+          <a:fillRef idx="0">
+            <a:schemeClr val="accent3"/>
+          </a:fillRef>
+          <a:effectRef idx="2">
+            <a:schemeClr val="accent3"/>
+          </a:effectRef>
+          <a:fontRef idx="minor">
+            <a:schemeClr val="tx1"/>
+          </a:fontRef>
+        </p:style>
+      </p:cxnSp>
+      <p:sp>
+        <p:nvSpPr>
+          <p:cNvPr id="2" name="文字方塊 1">
+            <a:extLst>
+              <a:ext uri="{FF2B5EF4-FFF2-40B4-BE49-F238E27FC236}">
+                <a16:creationId xmlns:a16="http://schemas.microsoft.com/office/drawing/2014/main" id="{07527925-4B8A-EBF5-1199-97163A72E8FE}"/>
+              </a:ext>
+            </a:extLst>
+          </p:cNvPr>
+          <p:cNvSpPr txBox="1"/>
+          <p:nvPr/>
+        </p:nvSpPr>
+        <p:spPr>
+          <a:xfrm>
+            <a:off x="9574161" y="1241323"/>
+            <a:ext cx="6096000" cy="669414"/>
+          </a:xfrm>
+          <a:prstGeom prst="rect">
+            <a:avLst/>
+          </a:prstGeom>
+          <a:noFill/>
+        </p:spPr>
+        <p:txBody>
+          <a:bodyPr rot="0" spcFirstLastPara="0" vertOverflow="overflow" horzOverflow="overflow" vert="horz" wrap="square" lIns="91440" tIns="45720" rIns="91440" bIns="45720" numCol="1" spcCol="0" rtlCol="0" fromWordArt="0" anchor="t" anchorCtr="0" forceAA="0" compatLnSpc="1">
+            <a:prstTxWarp prst="textNoShape">
+              <a:avLst/>
+            </a:prstTxWarp>
+            <a:spAutoFit/>
+          </a:bodyPr>
+          <a:lstStyle/>
+          <a:p>
+            <a:r>
+              <a:rPr lang="en-US" sz="1950" b="0" i="0" baseline="0">
+                <a:solidFill>
+                  <a:srgbClr val="132C44"/>
+                </a:solidFill>
+                <a:latin typeface="Microsoft JhengHei"/>
+              </a:rPr>
+              <a:t>傳送要求</a:t>
+            </a:r>
+            <a:endParaRPr lang="zh-TW" altLang="en-US"/>
+          </a:p>
+          <a:p>
+            <a:pPr algn="ctr"/>
+            <a:endParaRPr lang="zh-TW" altLang="en-US"/>
+          </a:p>
+        </p:txBody>
+      </p:sp>
+    </p:spTree>
+    <p:extLst>
+      <p:ext uri="{BB962C8B-B14F-4D97-AF65-F5344CB8AC3E}">
+        <p14:creationId xmlns:p14="http://schemas.microsoft.com/office/powerpoint/2010/main" val="1694855523"/>
+      </p:ext>
+    </p:extLst>
+  </p:cSld>
+  <p:clrMapOvr>
+    <a:masterClrMapping/>
+  </p:clrMapOvr>
+</p:sld>
+</file>
+
+<file path=ppt/slides/slide16.xml><?xml version="1.0" encoding="utf-8"?>
+<p:sld xmlns:a="http://schemas.openxmlformats.org/drawingml/2006/main" xmlns:r="http://schemas.openxmlformats.org/officeDocument/2006/relationships" xmlns:p="http://schemas.openxmlformats.org/presentationml/2006/main">
+  <p:cSld>
+    <p:bg>
+      <p:bgPr>
+        <a:solidFill>
+          <a:srgbClr val="FFFFFF"/>
+        </a:solidFill>
+        <a:effectLst/>
+      </p:bgPr>
+    </p:bg>
+    <p:spTree>
+      <p:nvGrpSpPr>
+        <p:cNvPr id="1" name="">
+          <a:extLst>
+            <a:ext uri="{FF2B5EF4-FFF2-40B4-BE49-F238E27FC236}">
+              <a16:creationId xmlns:a16="http://schemas.microsoft.com/office/drawing/2014/main" id="{9264FEB9-BA96-64CC-7B18-DF3666862B3B}"/>
+            </a:ext>
+          </a:extLst>
+        </p:cNvPr>
+        <p:cNvGrpSpPr/>
+        <p:nvPr/>
+      </p:nvGrpSpPr>
+      <p:grpSpPr>
+        <a:xfrm>
+          <a:off x="0" y="0"/>
+          <a:ext cx="0" cy="0"/>
+          <a:chOff x="0" y="0"/>
+          <a:chExt cx="0" cy="0"/>
+        </a:xfrm>
+      </p:grpSpPr>
+      <p:sp>
+        <p:nvSpPr>
+          <p:cNvPr id="7" name="矩形 6">
+            <a:extLst>
+              <a:ext uri="{FF2B5EF4-FFF2-40B4-BE49-F238E27FC236}">
+                <a16:creationId xmlns:a16="http://schemas.microsoft.com/office/drawing/2014/main" id="{C813FA34-7593-AFDB-A446-73A1BDCD5EEB}"/>
+              </a:ext>
+            </a:extLst>
+          </p:cNvPr>
+          <p:cNvSpPr>
+            <a:spLocks noGrp="1"/>
+          </p:cNvSpPr>
+          <p:nvPr/>
+        </p:nvSpPr>
+        <p:spPr>
+          <a:xfrm>
+            <a:off x="609600" y="285750"/>
+            <a:ext cx="10763250" cy="266700"/>
+          </a:xfrm>
+          <a:prstGeom prst="rect">
+            <a:avLst/>
+          </a:prstGeom>
+          <a:noFill/>
+          <a:ln w="0">
+            <a:noFill/>
+          </a:ln>
+        </p:spPr>
+        <p:txBody>
+          <a:bodyPr/>
+          <a:lstStyle>
+            <a:defPPr>
+              <a:defRPr sz="1425" b="1">
+                <a:solidFill>
+                  <a:srgbClr val="007C83"/>
+                </a:solidFill>
+                <a:latin typeface="Microsoft JhengHei"/>
+                <a:ea typeface="Microsoft JhengHei"/>
+                <a:cs typeface="Microsoft JhengHei"/>
+              </a:defRPr>
+            </a:defPPr>
+            <a:lvl1pPr>
+              <a:defRPr sz="1425" b="1">
+                <a:solidFill>
+                  <a:srgbClr val="007C83"/>
+                </a:solidFill>
+                <a:latin typeface="Microsoft JhengHei"/>
+                <a:ea typeface="Microsoft JhengHei"/>
+                <a:cs typeface="Microsoft JhengHei"/>
+              </a:defRPr>
+            </a:lvl1pPr>
+            <a:lvl2pPr>
+              <a:defRPr sz="1425" b="1">
+                <a:solidFill>
+                  <a:srgbClr val="007C83"/>
+                </a:solidFill>
+                <a:latin typeface="Microsoft JhengHei"/>
+                <a:ea typeface="Microsoft JhengHei"/>
+                <a:cs typeface="Microsoft JhengHei"/>
+              </a:defRPr>
+            </a:lvl2pPr>
+            <a:lvl3pPr>
+              <a:defRPr sz="1425" b="1">
+                <a:solidFill>
+                  <a:srgbClr val="007C83"/>
+                </a:solidFill>
+                <a:latin typeface="Microsoft JhengHei"/>
+                <a:ea typeface="Microsoft JhengHei"/>
+                <a:cs typeface="Microsoft JhengHei"/>
+              </a:defRPr>
+            </a:lvl3pPr>
+            <a:lvl4pPr>
+              <a:defRPr sz="1425" b="1">
+                <a:solidFill>
+                  <a:srgbClr val="007C83"/>
+                </a:solidFill>
+                <a:latin typeface="Microsoft JhengHei"/>
+                <a:ea typeface="Microsoft JhengHei"/>
+                <a:cs typeface="Microsoft JhengHei"/>
+              </a:defRPr>
+            </a:lvl4pPr>
+            <a:lvl5pPr>
+              <a:defRPr sz="1425" b="1">
+                <a:solidFill>
+                  <a:srgbClr val="007C83"/>
+                </a:solidFill>
+                <a:latin typeface="Microsoft JhengHei"/>
+                <a:ea typeface="Microsoft JhengHei"/>
+                <a:cs typeface="Microsoft JhengHei"/>
+              </a:defRPr>
+            </a:lvl5pPr>
+            <a:lvl6pPr>
+              <a:defRPr sz="1425" b="1">
+                <a:solidFill>
+                  <a:srgbClr val="007C83"/>
+                </a:solidFill>
+                <a:latin typeface="Microsoft JhengHei"/>
+                <a:ea typeface="Microsoft JhengHei"/>
+                <a:cs typeface="Microsoft JhengHei"/>
+              </a:defRPr>
+            </a:lvl6pPr>
+            <a:lvl7pPr>
+              <a:defRPr sz="1425" b="1">
+                <a:solidFill>
+                  <a:srgbClr val="007C83"/>
+                </a:solidFill>
+                <a:latin typeface="Microsoft JhengHei"/>
+                <a:ea typeface="Microsoft JhengHei"/>
+                <a:cs typeface="Microsoft JhengHei"/>
+              </a:defRPr>
+            </a:lvl7pPr>
+            <a:lvl8pPr>
+              <a:defRPr sz="1425" b="1">
+                <a:solidFill>
+                  <a:srgbClr val="007C83"/>
+                </a:solidFill>
+                <a:latin typeface="Microsoft JhengHei"/>
+                <a:ea typeface="Microsoft JhengHei"/>
+                <a:cs typeface="Microsoft JhengHei"/>
+              </a:defRPr>
+            </a:lvl8pPr>
+            <a:lvl9pPr>
+              <a:defRPr sz="1425" b="1">
+                <a:solidFill>
+                  <a:srgbClr val="007C83"/>
+                </a:solidFill>
+                <a:latin typeface="Microsoft JhengHei"/>
+                <a:ea typeface="Microsoft JhengHei"/>
+                <a:cs typeface="Microsoft JhengHei"/>
+              </a:defRPr>
+            </a:lvl9pPr>
+          </a:lstStyle>
+          <a:p>
+            <a:pPr>
+              <a:defRPr sz="1425" b="1">
+                <a:solidFill>
+                  <a:srgbClr val="007C83"/>
+                </a:solidFill>
+                <a:latin typeface="Microsoft JhengHei"/>
+                <a:ea typeface="Microsoft JhengHei"/>
+                <a:cs typeface="Microsoft JhengHei"/>
+              </a:defRPr>
+            </a:pPr>
+            <a:r>
+              <a:rPr sz="1425" b="1">
+                <a:solidFill>
+                  <a:srgbClr val="007C83"/>
+                </a:solidFill>
+                <a:latin typeface="Microsoft JhengHei"/>
+                <a:ea typeface="Microsoft JhengHei"/>
+                <a:cs typeface="Microsoft JhengHei"/>
+              </a:rPr>
+              <a:t>03  /  系統角色</a:t>
+            </a:r>
+          </a:p>
+        </p:txBody>
+      </p:sp>
+      <p:sp>
+        <p:nvSpPr>
+          <p:cNvPr id="4" name="矩形 3">
+            <a:extLst>
+              <a:ext uri="{FF2B5EF4-FFF2-40B4-BE49-F238E27FC236}">
+                <a16:creationId xmlns:a16="http://schemas.microsoft.com/office/drawing/2014/main" id="{A465F632-972F-CD63-ED3B-E6794FD834D7}"/>
+              </a:ext>
+            </a:extLst>
+          </p:cNvPr>
+          <p:cNvSpPr>
+            <a:spLocks noGrp="1"/>
+          </p:cNvSpPr>
+          <p:nvPr/>
+        </p:nvSpPr>
+        <p:spPr>
+          <a:xfrm>
+            <a:off x="10953750" y="6419850"/>
+            <a:ext cx="628650" cy="228600"/>
+          </a:xfrm>
+          <a:prstGeom prst="rect">
+            <a:avLst/>
+          </a:prstGeom>
+          <a:noFill/>
+          <a:ln w="0">
+            <a:noFill/>
+          </a:ln>
+        </p:spPr>
+        <p:txBody>
+          <a:bodyPr/>
+          <a:lstStyle>
+            <a:defPPr>
+              <a:defRPr sz="1200" b="0">
+                <a:solidFill>
+                  <a:srgbClr val="4D6475"/>
+                </a:solidFill>
+                <a:latin typeface="Microsoft JhengHei"/>
+                <a:ea typeface="Microsoft JhengHei"/>
+                <a:cs typeface="Microsoft JhengHei"/>
+              </a:defRPr>
+            </a:defPPr>
+            <a:lvl1pPr>
+              <a:defRPr sz="1200" b="0">
+                <a:solidFill>
+                  <a:srgbClr val="4D6475"/>
+                </a:solidFill>
+                <a:latin typeface="Microsoft JhengHei"/>
+                <a:ea typeface="Microsoft JhengHei"/>
+                <a:cs typeface="Microsoft JhengHei"/>
+              </a:defRPr>
+            </a:lvl1pPr>
+            <a:lvl2pPr>
+              <a:defRPr sz="1200" b="0">
+                <a:solidFill>
+                  <a:srgbClr val="4D6475"/>
+                </a:solidFill>
+                <a:latin typeface="Microsoft JhengHei"/>
+                <a:ea typeface="Microsoft JhengHei"/>
+                <a:cs typeface="Microsoft JhengHei"/>
+              </a:defRPr>
+            </a:lvl2pPr>
+            <a:lvl3pPr>
+              <a:defRPr sz="1200" b="0">
+                <a:solidFill>
+                  <a:srgbClr val="4D6475"/>
+                </a:solidFill>
+                <a:latin typeface="Microsoft JhengHei"/>
+                <a:ea typeface="Microsoft JhengHei"/>
+                <a:cs typeface="Microsoft JhengHei"/>
+              </a:defRPr>
+            </a:lvl3pPr>
+            <a:lvl4pPr>
+              <a:defRPr sz="1200" b="0">
+                <a:solidFill>
+                  <a:srgbClr val="4D6475"/>
+                </a:solidFill>
+                <a:latin typeface="Microsoft JhengHei"/>
+                <a:ea typeface="Microsoft JhengHei"/>
+                <a:cs typeface="Microsoft JhengHei"/>
+              </a:defRPr>
+            </a:lvl4pPr>
+            <a:lvl5pPr>
+              <a:defRPr sz="1200" b="0">
+                <a:solidFill>
+                  <a:srgbClr val="4D6475"/>
+                </a:solidFill>
+                <a:latin typeface="Microsoft JhengHei"/>
+                <a:ea typeface="Microsoft JhengHei"/>
+                <a:cs typeface="Microsoft JhengHei"/>
+              </a:defRPr>
+            </a:lvl5pPr>
+            <a:lvl6pPr>
+              <a:defRPr sz="1200" b="0">
+                <a:solidFill>
+                  <a:srgbClr val="4D6475"/>
+                </a:solidFill>
+                <a:latin typeface="Microsoft JhengHei"/>
+                <a:ea typeface="Microsoft JhengHei"/>
+                <a:cs typeface="Microsoft JhengHei"/>
+              </a:defRPr>
+            </a:lvl6pPr>
+            <a:lvl7pPr>
+              <a:defRPr sz="1200" b="0">
+                <a:solidFill>
+                  <a:srgbClr val="4D6475"/>
+                </a:solidFill>
+                <a:latin typeface="Microsoft JhengHei"/>
+                <a:ea typeface="Microsoft JhengHei"/>
+                <a:cs typeface="Microsoft JhengHei"/>
+              </a:defRPr>
+            </a:lvl7pPr>
+            <a:lvl8pPr>
+              <a:defRPr sz="1200" b="0">
+                <a:solidFill>
+                  <a:srgbClr val="4D6475"/>
+                </a:solidFill>
+                <a:latin typeface="Microsoft JhengHei"/>
+                <a:ea typeface="Microsoft JhengHei"/>
+                <a:cs typeface="Microsoft JhengHei"/>
+              </a:defRPr>
+            </a:lvl8pPr>
+            <a:lvl9pPr>
+              <a:defRPr sz="1200" b="0">
+                <a:solidFill>
+                  <a:srgbClr val="4D6475"/>
+                </a:solidFill>
+                <a:latin typeface="Microsoft JhengHei"/>
+                <a:ea typeface="Microsoft JhengHei"/>
+                <a:cs typeface="Microsoft JhengHei"/>
+              </a:defRPr>
+            </a:lvl9pPr>
+          </a:lstStyle>
+          <a:p>
+            <a:pPr>
+              <a:defRPr sz="1200" b="0">
+                <a:solidFill>
+                  <a:srgbClr val="4D6475"/>
+                </a:solidFill>
+                <a:latin typeface="Microsoft JhengHei"/>
+                <a:ea typeface="Microsoft JhengHei"/>
+                <a:cs typeface="Microsoft JhengHei"/>
+              </a:defRPr>
+            </a:pPr>
+            <a:r>
+              <a:rPr sz="1200" b="0">
+                <a:solidFill>
+                  <a:srgbClr val="4D6475"/>
+                </a:solidFill>
+                <a:latin typeface="Microsoft JhengHei"/>
+                <a:ea typeface="Microsoft JhengHei"/>
+                <a:cs typeface="Microsoft JhengHei"/>
+              </a:rPr>
+              <a:t>04</a:t>
+            </a:r>
+          </a:p>
+        </p:txBody>
+      </p:sp>
+      <p:pic>
+        <p:nvPicPr>
+          <p:cNvPr id="8" name="圖片 7">
+            <a:extLst>
+              <a:ext uri="{FF2B5EF4-FFF2-40B4-BE49-F238E27FC236}">
+                <a16:creationId xmlns:a16="http://schemas.microsoft.com/office/drawing/2014/main" id="{06E925DB-EAE9-E8CF-C047-9D4C4AE3882F}"/>
+              </a:ext>
+            </a:extLst>
+          </p:cNvPr>
+          <p:cNvPicPr>
+            <a:picLocks noChangeAspect="1"/>
+          </p:cNvPicPr>
+          <p:nvPr/>
+        </p:nvPicPr>
+        <p:blipFill>
+          <a:blip r:embed="rId3"/>
+          <a:stretch>
+            <a:fillRect/>
+          </a:stretch>
+        </p:blipFill>
+        <p:spPr>
+          <a:xfrm>
+            <a:off x="2909887" y="260852"/>
+            <a:ext cx="6372225" cy="6162675"/>
+          </a:xfrm>
+          <a:prstGeom prst="rect">
+            <a:avLst/>
+          </a:prstGeom>
+        </p:spPr>
+      </p:pic>
+      <p:cxnSp>
+        <p:nvCxnSpPr>
+          <p:cNvPr id="5" name="直線單箭頭接點 4">
+            <a:extLst>
+              <a:ext uri="{FF2B5EF4-FFF2-40B4-BE49-F238E27FC236}">
+                <a16:creationId xmlns:a16="http://schemas.microsoft.com/office/drawing/2014/main" id="{C5D97C68-AF76-1963-5904-DFD7B9595F60}"/>
+              </a:ext>
+            </a:extLst>
+          </p:cNvPr>
+          <p:cNvCxnSpPr>
+            <a:cxnSpLocks/>
+          </p:cNvCxnSpPr>
+          <p:nvPr/>
+        </p:nvCxnSpPr>
+        <p:spPr>
+          <a:xfrm flipV="1">
+            <a:off x="6095999" y="2875936"/>
+            <a:ext cx="4154128" cy="49160"/>
+          </a:xfrm>
+          <a:prstGeom prst="straightConnector1">
+            <a:avLst/>
+          </a:prstGeom>
+          <a:ln w="57150">
+            <a:solidFill>
+              <a:srgbClr val="C00000"/>
+            </a:solidFill>
+            <a:tailEnd type="triangle"/>
+          </a:ln>
+        </p:spPr>
+        <p:style>
+          <a:lnRef idx="3">
+            <a:schemeClr val="accent3"/>
+          </a:lnRef>
+          <a:fillRef idx="0">
+            <a:schemeClr val="accent3"/>
+          </a:fillRef>
+          <a:effectRef idx="2">
+            <a:schemeClr val="accent3"/>
+          </a:effectRef>
+          <a:fontRef idx="minor">
+            <a:schemeClr val="tx1"/>
+          </a:fontRef>
+        </p:style>
+      </p:cxnSp>
+      <p:sp>
+        <p:nvSpPr>
+          <p:cNvPr id="2" name="文字方塊 1">
+            <a:extLst>
+              <a:ext uri="{FF2B5EF4-FFF2-40B4-BE49-F238E27FC236}">
+                <a16:creationId xmlns:a16="http://schemas.microsoft.com/office/drawing/2014/main" id="{1CF5A267-68BB-BD93-A80B-C48574B333C0}"/>
+              </a:ext>
+            </a:extLst>
+          </p:cNvPr>
+          <p:cNvSpPr txBox="1"/>
+          <p:nvPr/>
+        </p:nvSpPr>
+        <p:spPr>
+          <a:xfrm>
+            <a:off x="10250129" y="2654710"/>
+            <a:ext cx="6096000" cy="669414"/>
+          </a:xfrm>
+          <a:prstGeom prst="rect">
+            <a:avLst/>
+          </a:prstGeom>
+          <a:noFill/>
+        </p:spPr>
+        <p:txBody>
+          <a:bodyPr rot="0" spcFirstLastPara="0" vertOverflow="overflow" horzOverflow="overflow" vert="horz" wrap="square" lIns="91440" tIns="45720" rIns="91440" bIns="45720" numCol="1" spcCol="0" rtlCol="0" fromWordArt="0" anchor="t" anchorCtr="0" forceAA="0" compatLnSpc="1">
+            <a:prstTxWarp prst="textNoShape">
+              <a:avLst/>
+            </a:prstTxWarp>
+            <a:spAutoFit/>
+          </a:bodyPr>
+          <a:lstStyle/>
+          <a:p>
+            <a:r>
+              <a:rPr lang="en-US" sz="1950" b="0" i="0" baseline="0">
+                <a:solidFill>
+                  <a:srgbClr val="132C44"/>
+                </a:solidFill>
+                <a:latin typeface="Microsoft JhengHei"/>
+              </a:rPr>
+              <a:t>執行操作</a:t>
+            </a:r>
+            <a:endParaRPr lang="zh-TW" altLang="en-US"/>
+          </a:p>
+          <a:p>
+            <a:pPr algn="ctr"/>
+            <a:endParaRPr lang="zh-TW" altLang="en-US"/>
+          </a:p>
+        </p:txBody>
+      </p:sp>
+    </p:spTree>
+    <p:extLst>
+      <p:ext uri="{BB962C8B-B14F-4D97-AF65-F5344CB8AC3E}">
+        <p14:creationId xmlns:p14="http://schemas.microsoft.com/office/powerpoint/2010/main" val="675606571"/>
+      </p:ext>
+    </p:extLst>
+  </p:cSld>
+  <p:clrMapOvr>
+    <a:masterClrMapping/>
+  </p:clrMapOvr>
+</p:sld>
+</file>
+
+<file path=ppt/slides/slide17.xml><?xml version="1.0" encoding="utf-8"?>
+<p:sld xmlns:a="http://schemas.openxmlformats.org/drawingml/2006/main" xmlns:r="http://schemas.openxmlformats.org/officeDocument/2006/relationships" xmlns:p="http://schemas.openxmlformats.org/presentationml/2006/main">
+  <p:cSld>
+    <p:bg>
+      <p:bgPr>
+        <a:solidFill>
+          <a:srgbClr val="FFFFFF"/>
+        </a:solidFill>
+        <a:effectLst/>
+      </p:bgPr>
+    </p:bg>
+    <p:spTree>
+      <p:nvGrpSpPr>
+        <p:cNvPr id="1" name="">
+          <a:extLst>
+            <a:ext uri="{FF2B5EF4-FFF2-40B4-BE49-F238E27FC236}">
+              <a16:creationId xmlns:a16="http://schemas.microsoft.com/office/drawing/2014/main" id="{E08A79AF-35CC-C0E7-BB78-355D7C246A8D}"/>
+            </a:ext>
+          </a:extLst>
+        </p:cNvPr>
+        <p:cNvGrpSpPr/>
+        <p:nvPr/>
+      </p:nvGrpSpPr>
+      <p:grpSpPr>
+        <a:xfrm>
+          <a:off x="0" y="0"/>
+          <a:ext cx="0" cy="0"/>
+          <a:chOff x="0" y="0"/>
+          <a:chExt cx="0" cy="0"/>
+        </a:xfrm>
+      </p:grpSpPr>
+      <p:sp>
+        <p:nvSpPr>
+          <p:cNvPr id="7" name="矩形 6">
+            <a:extLst>
+              <a:ext uri="{FF2B5EF4-FFF2-40B4-BE49-F238E27FC236}">
+                <a16:creationId xmlns:a16="http://schemas.microsoft.com/office/drawing/2014/main" id="{FE56AC46-8662-6D06-20D9-38B85524535D}"/>
+              </a:ext>
+            </a:extLst>
+          </p:cNvPr>
+          <p:cNvSpPr>
+            <a:spLocks noGrp="1"/>
+          </p:cNvSpPr>
+          <p:nvPr/>
+        </p:nvSpPr>
+        <p:spPr>
+          <a:xfrm>
+            <a:off x="609600" y="285750"/>
+            <a:ext cx="10763250" cy="266700"/>
+          </a:xfrm>
+          <a:prstGeom prst="rect">
+            <a:avLst/>
+          </a:prstGeom>
+          <a:noFill/>
+          <a:ln w="0">
+            <a:noFill/>
+          </a:ln>
+        </p:spPr>
+        <p:txBody>
+          <a:bodyPr/>
+          <a:lstStyle>
+            <a:defPPr>
+              <a:defRPr sz="1425" b="1">
+                <a:solidFill>
+                  <a:srgbClr val="007C83"/>
+                </a:solidFill>
+                <a:latin typeface="Microsoft JhengHei"/>
+                <a:ea typeface="Microsoft JhengHei"/>
+                <a:cs typeface="Microsoft JhengHei"/>
+              </a:defRPr>
+            </a:defPPr>
+            <a:lvl1pPr>
+              <a:defRPr sz="1425" b="1">
+                <a:solidFill>
+                  <a:srgbClr val="007C83"/>
+                </a:solidFill>
+                <a:latin typeface="Microsoft JhengHei"/>
+                <a:ea typeface="Microsoft JhengHei"/>
+                <a:cs typeface="Microsoft JhengHei"/>
+              </a:defRPr>
+            </a:lvl1pPr>
+            <a:lvl2pPr>
+              <a:defRPr sz="1425" b="1">
+                <a:solidFill>
+                  <a:srgbClr val="007C83"/>
+                </a:solidFill>
+                <a:latin typeface="Microsoft JhengHei"/>
+                <a:ea typeface="Microsoft JhengHei"/>
+                <a:cs typeface="Microsoft JhengHei"/>
+              </a:defRPr>
+            </a:lvl2pPr>
+            <a:lvl3pPr>
+              <a:defRPr sz="1425" b="1">
+                <a:solidFill>
+                  <a:srgbClr val="007C83"/>
+                </a:solidFill>
+                <a:latin typeface="Microsoft JhengHei"/>
+                <a:ea typeface="Microsoft JhengHei"/>
+                <a:cs typeface="Microsoft JhengHei"/>
+              </a:defRPr>
+            </a:lvl3pPr>
+            <a:lvl4pPr>
+              <a:defRPr sz="1425" b="1">
+                <a:solidFill>
+                  <a:srgbClr val="007C83"/>
+                </a:solidFill>
+                <a:latin typeface="Microsoft JhengHei"/>
+                <a:ea typeface="Microsoft JhengHei"/>
+                <a:cs typeface="Microsoft JhengHei"/>
+              </a:defRPr>
+            </a:lvl4pPr>
+            <a:lvl5pPr>
+              <a:defRPr sz="1425" b="1">
+                <a:solidFill>
+                  <a:srgbClr val="007C83"/>
+                </a:solidFill>
+                <a:latin typeface="Microsoft JhengHei"/>
+                <a:ea typeface="Microsoft JhengHei"/>
+                <a:cs typeface="Microsoft JhengHei"/>
+              </a:defRPr>
+            </a:lvl5pPr>
+            <a:lvl6pPr>
+              <a:defRPr sz="1425" b="1">
+                <a:solidFill>
+                  <a:srgbClr val="007C83"/>
+                </a:solidFill>
+                <a:latin typeface="Microsoft JhengHei"/>
+                <a:ea typeface="Microsoft JhengHei"/>
+                <a:cs typeface="Microsoft JhengHei"/>
+              </a:defRPr>
+            </a:lvl6pPr>
+            <a:lvl7pPr>
+              <a:defRPr sz="1425" b="1">
+                <a:solidFill>
+                  <a:srgbClr val="007C83"/>
+                </a:solidFill>
+                <a:latin typeface="Microsoft JhengHei"/>
+                <a:ea typeface="Microsoft JhengHei"/>
+                <a:cs typeface="Microsoft JhengHei"/>
+              </a:defRPr>
+            </a:lvl7pPr>
+            <a:lvl8pPr>
+              <a:defRPr sz="1425" b="1">
+                <a:solidFill>
+                  <a:srgbClr val="007C83"/>
+                </a:solidFill>
+                <a:latin typeface="Microsoft JhengHei"/>
+                <a:ea typeface="Microsoft JhengHei"/>
+                <a:cs typeface="Microsoft JhengHei"/>
+              </a:defRPr>
+            </a:lvl8pPr>
+            <a:lvl9pPr>
+              <a:defRPr sz="1425" b="1">
+                <a:solidFill>
+                  <a:srgbClr val="007C83"/>
+                </a:solidFill>
+                <a:latin typeface="Microsoft JhengHei"/>
+                <a:ea typeface="Microsoft JhengHei"/>
+                <a:cs typeface="Microsoft JhengHei"/>
+              </a:defRPr>
+            </a:lvl9pPr>
+          </a:lstStyle>
+          <a:p>
+            <a:pPr>
+              <a:defRPr sz="1425" b="1">
+                <a:solidFill>
+                  <a:srgbClr val="007C83"/>
+                </a:solidFill>
+                <a:latin typeface="Microsoft JhengHei"/>
+                <a:ea typeface="Microsoft JhengHei"/>
+                <a:cs typeface="Microsoft JhengHei"/>
+              </a:defRPr>
+            </a:pPr>
+            <a:r>
+              <a:rPr sz="1425" b="1">
+                <a:solidFill>
+                  <a:srgbClr val="007C83"/>
+                </a:solidFill>
+                <a:latin typeface="Microsoft JhengHei"/>
+                <a:ea typeface="Microsoft JhengHei"/>
+                <a:cs typeface="Microsoft JhengHei"/>
+              </a:rPr>
+              <a:t>03  /  系統角色</a:t>
+            </a:r>
+          </a:p>
+        </p:txBody>
+      </p:sp>
+      <p:sp>
+        <p:nvSpPr>
+          <p:cNvPr id="4" name="矩形 3">
+            <a:extLst>
+              <a:ext uri="{FF2B5EF4-FFF2-40B4-BE49-F238E27FC236}">
+                <a16:creationId xmlns:a16="http://schemas.microsoft.com/office/drawing/2014/main" id="{5BCB67D7-A080-05CB-311B-40B47265DDCD}"/>
+              </a:ext>
+            </a:extLst>
+          </p:cNvPr>
+          <p:cNvSpPr>
+            <a:spLocks noGrp="1"/>
+          </p:cNvSpPr>
+          <p:nvPr/>
+        </p:nvSpPr>
+        <p:spPr>
+          <a:xfrm>
+            <a:off x="10953750" y="6419850"/>
+            <a:ext cx="628650" cy="228600"/>
+          </a:xfrm>
+          <a:prstGeom prst="rect">
+            <a:avLst/>
+          </a:prstGeom>
+          <a:noFill/>
+          <a:ln w="0">
+            <a:noFill/>
+          </a:ln>
+        </p:spPr>
+        <p:txBody>
+          <a:bodyPr/>
+          <a:lstStyle>
+            <a:defPPr>
+              <a:defRPr sz="1200" b="0">
+                <a:solidFill>
+                  <a:srgbClr val="4D6475"/>
+                </a:solidFill>
+                <a:latin typeface="Microsoft JhengHei"/>
+                <a:ea typeface="Microsoft JhengHei"/>
+                <a:cs typeface="Microsoft JhengHei"/>
+              </a:defRPr>
+            </a:defPPr>
+            <a:lvl1pPr>
+              <a:defRPr sz="1200" b="0">
+                <a:solidFill>
+                  <a:srgbClr val="4D6475"/>
+                </a:solidFill>
+                <a:latin typeface="Microsoft JhengHei"/>
+                <a:ea typeface="Microsoft JhengHei"/>
+                <a:cs typeface="Microsoft JhengHei"/>
+              </a:defRPr>
+            </a:lvl1pPr>
+            <a:lvl2pPr>
+              <a:defRPr sz="1200" b="0">
+                <a:solidFill>
+                  <a:srgbClr val="4D6475"/>
+                </a:solidFill>
+                <a:latin typeface="Microsoft JhengHei"/>
+                <a:ea typeface="Microsoft JhengHei"/>
+                <a:cs typeface="Microsoft JhengHei"/>
+              </a:defRPr>
+            </a:lvl2pPr>
+            <a:lvl3pPr>
+              <a:defRPr sz="1200" b="0">
+                <a:solidFill>
+                  <a:srgbClr val="4D6475"/>
+                </a:solidFill>
+                <a:latin typeface="Microsoft JhengHei"/>
+                <a:ea typeface="Microsoft JhengHei"/>
+                <a:cs typeface="Microsoft JhengHei"/>
+              </a:defRPr>
+            </a:lvl3pPr>
+            <a:lvl4pPr>
+              <a:defRPr sz="1200" b="0">
+                <a:solidFill>
+                  <a:srgbClr val="4D6475"/>
+                </a:solidFill>
+                <a:latin typeface="Microsoft JhengHei"/>
+                <a:ea typeface="Microsoft JhengHei"/>
+                <a:cs typeface="Microsoft JhengHei"/>
+              </a:defRPr>
+            </a:lvl4pPr>
+            <a:lvl5pPr>
+              <a:defRPr sz="1200" b="0">
+                <a:solidFill>
+                  <a:srgbClr val="4D6475"/>
+                </a:solidFill>
+                <a:latin typeface="Microsoft JhengHei"/>
+                <a:ea typeface="Microsoft JhengHei"/>
+                <a:cs typeface="Microsoft JhengHei"/>
+              </a:defRPr>
+            </a:lvl5pPr>
+            <a:lvl6pPr>
+              <a:defRPr sz="1200" b="0">
+                <a:solidFill>
+                  <a:srgbClr val="4D6475"/>
+                </a:solidFill>
+                <a:latin typeface="Microsoft JhengHei"/>
+                <a:ea typeface="Microsoft JhengHei"/>
+                <a:cs typeface="Microsoft JhengHei"/>
+              </a:defRPr>
+            </a:lvl6pPr>
+            <a:lvl7pPr>
+              <a:defRPr sz="1200" b="0">
+                <a:solidFill>
+                  <a:srgbClr val="4D6475"/>
+                </a:solidFill>
+                <a:latin typeface="Microsoft JhengHei"/>
+                <a:ea typeface="Microsoft JhengHei"/>
+                <a:cs typeface="Microsoft JhengHei"/>
+              </a:defRPr>
+            </a:lvl7pPr>
+            <a:lvl8pPr>
+              <a:defRPr sz="1200" b="0">
+                <a:solidFill>
+                  <a:srgbClr val="4D6475"/>
+                </a:solidFill>
+                <a:latin typeface="Microsoft JhengHei"/>
+                <a:ea typeface="Microsoft JhengHei"/>
+                <a:cs typeface="Microsoft JhengHei"/>
+              </a:defRPr>
+            </a:lvl8pPr>
+            <a:lvl9pPr>
+              <a:defRPr sz="1200" b="0">
+                <a:solidFill>
+                  <a:srgbClr val="4D6475"/>
+                </a:solidFill>
+                <a:latin typeface="Microsoft JhengHei"/>
+                <a:ea typeface="Microsoft JhengHei"/>
+                <a:cs typeface="Microsoft JhengHei"/>
+              </a:defRPr>
+            </a:lvl9pPr>
+          </a:lstStyle>
+          <a:p>
+            <a:pPr>
+              <a:defRPr sz="1200" b="0">
+                <a:solidFill>
+                  <a:srgbClr val="4D6475"/>
+                </a:solidFill>
+                <a:latin typeface="Microsoft JhengHei"/>
+                <a:ea typeface="Microsoft JhengHei"/>
+                <a:cs typeface="Microsoft JhengHei"/>
+              </a:defRPr>
+            </a:pPr>
+            <a:r>
+              <a:rPr sz="1200" b="0">
+                <a:solidFill>
+                  <a:srgbClr val="4D6475"/>
+                </a:solidFill>
+                <a:latin typeface="Microsoft JhengHei"/>
+                <a:ea typeface="Microsoft JhengHei"/>
+                <a:cs typeface="Microsoft JhengHei"/>
+              </a:rPr>
+              <a:t>04</a:t>
+            </a:r>
+          </a:p>
+        </p:txBody>
+      </p:sp>
+      <p:pic>
+        <p:nvPicPr>
+          <p:cNvPr id="8" name="圖片 7">
+            <a:extLst>
+              <a:ext uri="{FF2B5EF4-FFF2-40B4-BE49-F238E27FC236}">
+                <a16:creationId xmlns:a16="http://schemas.microsoft.com/office/drawing/2014/main" id="{8D1EFFD9-E99D-F360-C876-6A781D441EAF}"/>
+              </a:ext>
+            </a:extLst>
+          </p:cNvPr>
+          <p:cNvPicPr>
+            <a:picLocks noChangeAspect="1"/>
+          </p:cNvPicPr>
+          <p:nvPr/>
+        </p:nvPicPr>
+        <p:blipFill>
+          <a:blip r:embed="rId3"/>
+          <a:stretch>
+            <a:fillRect/>
+          </a:stretch>
+        </p:blipFill>
+        <p:spPr>
+          <a:xfrm>
+            <a:off x="2909887" y="260852"/>
+            <a:ext cx="6372225" cy="6162675"/>
+          </a:xfrm>
+          <a:prstGeom prst="rect">
+            <a:avLst/>
+          </a:prstGeom>
+        </p:spPr>
+      </p:pic>
+      <p:cxnSp>
+        <p:nvCxnSpPr>
+          <p:cNvPr id="5" name="直線單箭頭接點 4">
+            <a:extLst>
+              <a:ext uri="{FF2B5EF4-FFF2-40B4-BE49-F238E27FC236}">
+                <a16:creationId xmlns:a16="http://schemas.microsoft.com/office/drawing/2014/main" id="{CCB55101-ED6C-2683-EECC-03039083AD66}"/>
+              </a:ext>
+            </a:extLst>
+          </p:cNvPr>
+          <p:cNvCxnSpPr>
+            <a:cxnSpLocks/>
+          </p:cNvCxnSpPr>
+          <p:nvPr/>
+        </p:nvCxnSpPr>
+        <p:spPr>
+          <a:xfrm flipV="1">
+            <a:off x="6956321" y="1978741"/>
+            <a:ext cx="2593258" cy="12290"/>
+          </a:xfrm>
+          <a:prstGeom prst="straightConnector1">
+            <a:avLst/>
+          </a:prstGeom>
+          <a:ln w="57150">
+            <a:solidFill>
+              <a:srgbClr val="C00000"/>
+            </a:solidFill>
+            <a:tailEnd type="triangle"/>
+          </a:ln>
+        </p:spPr>
+        <p:style>
+          <a:lnRef idx="3">
+            <a:schemeClr val="accent3"/>
+          </a:lnRef>
+          <a:fillRef idx="0">
+            <a:schemeClr val="accent3"/>
+          </a:fillRef>
+          <a:effectRef idx="2">
+            <a:schemeClr val="accent3"/>
+          </a:effectRef>
+          <a:fontRef idx="minor">
+            <a:schemeClr val="tx1"/>
+          </a:fontRef>
+        </p:style>
+      </p:cxnSp>
+      <p:sp>
+        <p:nvSpPr>
+          <p:cNvPr id="2" name="文字方塊 1">
+            <a:extLst>
+              <a:ext uri="{FF2B5EF4-FFF2-40B4-BE49-F238E27FC236}">
+                <a16:creationId xmlns:a16="http://schemas.microsoft.com/office/drawing/2014/main" id="{283875C9-1B14-C0F8-5168-2BF7EB0717C1}"/>
+              </a:ext>
+            </a:extLst>
+          </p:cNvPr>
+          <p:cNvSpPr txBox="1"/>
+          <p:nvPr/>
+        </p:nvSpPr>
+        <p:spPr>
+          <a:xfrm>
+            <a:off x="9549581" y="1720645"/>
+            <a:ext cx="6096000" cy="669414"/>
+          </a:xfrm>
+          <a:prstGeom prst="rect">
+            <a:avLst/>
+          </a:prstGeom>
+          <a:noFill/>
+        </p:spPr>
+        <p:txBody>
+          <a:bodyPr rot="0" spcFirstLastPara="0" vertOverflow="overflow" horzOverflow="overflow" vert="horz" wrap="square" lIns="91440" tIns="45720" rIns="91440" bIns="45720" numCol="1" spcCol="0" rtlCol="0" fromWordArt="0" anchor="t" anchorCtr="0" forceAA="0" compatLnSpc="1">
+            <a:prstTxWarp prst="textNoShape">
+              <a:avLst/>
+            </a:prstTxWarp>
+            <a:spAutoFit/>
+          </a:bodyPr>
+          <a:lstStyle/>
+          <a:p>
+            <a:r>
+              <a:rPr lang="en-US" sz="1950" b="0" i="0" baseline="0">
+                <a:solidFill>
+                  <a:srgbClr val="132C44"/>
+                </a:solidFill>
+                <a:latin typeface="Microsoft JhengHei"/>
+              </a:rPr>
+              <a:t>檢查結果是否符合任務</a:t>
+            </a:r>
+            <a:endParaRPr lang="zh-TW" altLang="en-US"/>
+          </a:p>
+          <a:p>
+            <a:pPr algn="ctr"/>
+            <a:endParaRPr lang="zh-TW" altLang="en-US"/>
+          </a:p>
+        </p:txBody>
+      </p:sp>
+    </p:spTree>
+    <p:extLst>
+      <p:ext uri="{BB962C8B-B14F-4D97-AF65-F5344CB8AC3E}">
+        <p14:creationId xmlns:p14="http://schemas.microsoft.com/office/powerpoint/2010/main" val="2667698022"/>
+      </p:ext>
+    </p:extLst>
+  </p:cSld>
+  <p:clrMapOvr>
+    <a:masterClrMapping/>
+  </p:clrMapOvr>
+</p:sld>
+</file>
+
 <file path=ppt/slides/slide2.xml><?xml version="1.0" encoding="utf-8"?>
 <p:sld xmlns:a="http://schemas.openxmlformats.org/drawingml/2006/main" xmlns:r="http://schemas.openxmlformats.org/officeDocument/2006/relationships" xmlns:p="http://schemas.openxmlformats.org/presentationml/2006/main">
   <p:cSld>
